--- a/presentation/全国にトータルサポートを_クロスボーダー発表.pptx
+++ b/presentation/全国にトータルサポートを_クロスボーダー発表.pptx
@@ -117,348 +117,6 @@
 </file>
 
 <file path=ppt/charts/chart1.xml><?xml version="1.0" encoding="utf-8"?>
-<c:chartSpace xmlns:c="http://schemas.openxmlformats.org/drawingml/2006/chart" xmlns:a="http://schemas.openxmlformats.org/drawingml/2006/main" xmlns:r="http://schemas.openxmlformats.org/officeDocument/2006/relationships">
-  <c:date1904 val="0"/>
-  <c:roundedCorners val="1"/>
-  <c:chart>
-    <c:title>
-      <c:tx>
-        <c:rich>
-          <a:bodyPr/>
-          <a:lstStyle/>
-          <a:p>
-            <a:pPr>
-              <a:defRPr sz="1300" b="0" i="0" u="none" strike="noStrike">
-                <a:solidFill>
-                  <a:srgbClr val="2E3440"/>
-                </a:solidFill>
-                <a:latin typeface="Meiryo UI"/>
-              </a:defRPr>
-            </a:pPr>
-            <a:r>
-              <a:rPr sz="1300" b="0" i="0" u="none" strike="noStrike">
-                <a:solidFill>
-                  <a:srgbClr val="2E3440"/>
-                </a:solidFill>
-                <a:latin typeface="Meiryo UI"/>
-              </a:rPr>
-              <a:t>B型事業所が取り組む作業（上位6・複数回答）</a:t>
-            </a:r>
-          </a:p>
-        </c:rich>
-      </c:tx>
-      <c:layout/>
-      <c:overlay val="0"/>
-    </c:title>
-    <c:autoTitleDeleted val="0"/>
-    <c:plotArea>
-      <c:layout/>
-      <c:barChart>
-        <c:barDir val="bar"/>
-        <c:grouping val="clustered"/>
-        <c:varyColors val="0"/>
-        <c:ser>
-          <c:idx val="0"/>
-          <c:order val="0"/>
-          <c:tx>
-            <c:strRef>
-              <c:f>Sheet1!$B$1</c:f>
-              <c:strCache>
-                <c:ptCount val="1"/>
-                <c:pt idx="0">
-                  <c:v>実施している事業所の割合</c:v>
-                </c:pt>
-              </c:strCache>
-            </c:strRef>
-          </c:tx>
-          <c:spPr>
-            <a:solidFill>
-              <a:srgbClr val="1F5FD6"/>
-            </a:solidFill>
-            <a:effectLst/>
-          </c:spPr>
-          <c:invertIfNegative val="0"/>
-          <c:dLbls>
-            <c:numFmt formatCode="0.0&quot;%&quot;" sourceLinked="0"/>
-            <c:txPr>
-              <a:bodyPr/>
-              <a:lstStyle/>
-              <a:p>
-                <a:pPr>
-                  <a:defRPr b="1" i="0" strike="noStrike" sz="1200" u="none">
-                    <a:solidFill>
-                      <a:srgbClr val="2E3440"/>
-                    </a:solidFill>
-                    <a:latin typeface="Meiryo UI"/>
-                  </a:defRPr>
-                </a:pPr>
-              </a:p>
-            </c:txPr>
-            <c:showLegendKey val="0"/>
-            <c:showVal val="1"/>
-            <c:showCatName val="0"/>
-            <c:showSerName val="0"/>
-            <c:showPercent val="0"/>
-            <c:showBubbleSize val="0"/>
-            <c:showLeaderLines val="0"/>
-          </c:dLbls>
-          <c:dPt>
-            <c:idx val="0"/>
-            <c:invertIfNegative val="0"/>
-            <c:bubble3D val="0"/>
-            <c:spPr>
-              <a:solidFill>
-                <a:srgbClr val="1F5FD6"/>
-              </a:solidFill>
-              <a:effectLst/>
-            </c:spPr>
-          </c:dPt>
-          <c:dPt>
-            <c:idx val="1"/>
-            <c:invertIfNegative val="0"/>
-            <c:bubble3D val="0"/>
-            <c:spPr>
-              <a:solidFill>
-                <a:srgbClr val="C9CFDA"/>
-              </a:solidFill>
-              <a:effectLst/>
-            </c:spPr>
-          </c:dPt>
-          <c:dPt>
-            <c:idx val="2"/>
-            <c:invertIfNegative val="0"/>
-            <c:bubble3D val="0"/>
-            <c:spPr>
-              <a:solidFill>
-                <a:srgbClr val="C9CFDA"/>
-              </a:solidFill>
-              <a:effectLst/>
-            </c:spPr>
-          </c:dPt>
-          <c:dPt>
-            <c:idx val="3"/>
-            <c:invertIfNegative val="0"/>
-            <c:bubble3D val="0"/>
-            <c:spPr>
-              <a:solidFill>
-                <a:srgbClr val="C9CFDA"/>
-              </a:solidFill>
-              <a:effectLst/>
-            </c:spPr>
-          </c:dPt>
-          <c:dPt>
-            <c:idx val="4"/>
-            <c:invertIfNegative val="0"/>
-            <c:bubble3D val="0"/>
-            <c:spPr>
-              <a:solidFill>
-                <a:srgbClr val="C9CFDA"/>
-              </a:solidFill>
-              <a:effectLst/>
-            </c:spPr>
-          </c:dPt>
-          <c:dPt>
-            <c:idx val="5"/>
-            <c:invertIfNegative val="0"/>
-            <c:bubble3D val="0"/>
-            <c:spPr>
-              <a:solidFill>
-                <a:srgbClr val="C9CFDA"/>
-              </a:solidFill>
-              <a:effectLst/>
-            </c:spPr>
-          </c:dPt>
-          <c:cat>
-            <c:multiLvlStrRef>
-              <c:f>Sheet1!$A$2:$A$7</c:f>
-              <c:multiLvlStrCache>
-                <c:ptCount val="6"/>
-                <c:lvl>
-                  <c:pt idx="0">
-                    <c:v>軽作業</c:v>
-                  </c:pt>
-                  <c:pt idx="1">
-                    <c:v>清掃</c:v>
-                  </c:pt>
-                  <c:pt idx="2">
-                    <c:v>雑貨製造</c:v>
-                  </c:pt>
-                  <c:pt idx="3">
-                    <c:v>菓子製造</c:v>
-                  </c:pt>
-                  <c:pt idx="4">
-                    <c:v>農業</c:v>
-                  </c:pt>
-                  <c:pt idx="5">
-                    <c:v>リサイクル</c:v>
-                  </c:pt>
-                </c:lvl>
-              </c:multiLvlStrCache>
-            </c:multiLvlStrRef>
-          </c:cat>
-          <c:val>
-            <c:numRef>
-              <c:f>Sheet1!$B$2:$B$7</c:f>
-              <c:numCache>
-                <c:formatCode>General</c:formatCode>
-                <c:ptCount val="6"/>
-                <c:pt idx="0">
-                  <c:v>63.6</c:v>
-                </c:pt>
-                <c:pt idx="1">
-                  <c:v>27.8</c:v>
-                </c:pt>
-                <c:pt idx="2">
-                  <c:v>23.1</c:v>
-                </c:pt>
-                <c:pt idx="3">
-                  <c:v>15.2</c:v>
-                </c:pt>
-                <c:pt idx="4">
-                  <c:v>12</c:v>
-                </c:pt>
-                <c:pt idx="5">
-                  <c:v>10.8</c:v>
-                </c:pt>
-              </c:numCache>
-            </c:numRef>
-          </c:val>
-        </c:ser>
-        <c:dLbls>
-          <c:numFmt formatCode="0.0&quot;%&quot;" sourceLinked="0"/>
-          <c:txPr>
-            <a:bodyPr/>
-            <a:lstStyle/>
-            <a:p>
-              <a:pPr>
-                <a:defRPr b="1" i="0" strike="noStrike" sz="1200" u="none">
-                  <a:solidFill>
-                    <a:srgbClr val="2E3440"/>
-                  </a:solidFill>
-                  <a:latin typeface="Meiryo UI"/>
-                </a:defRPr>
-              </a:pPr>
-            </a:p>
-          </c:txPr>
-          <c:showLegendKey val="0"/>
-          <c:showVal val="1"/>
-          <c:showCatName val="0"/>
-          <c:showSerName val="0"/>
-          <c:showPercent val="0"/>
-          <c:showBubbleSize val="0"/>
-          <c:showLeaderLines val="0"/>
-        </c:dLbls>
-        <c:gapWidth val="55"/>
-        <c:overlap val="0"/>
-        <c:axId val="2094734554"/>
-        <c:axId val="2094734552"/>
-        <c:axId val="2094734556"/>
-      </c:barChart>
-      <c:catAx>
-        <c:axId val="2094734554"/>
-        <c:scaling>
-          <c:orientation val="maxMin"/>
-        </c:scaling>
-        <c:delete val="0"/>
-        <c:axPos val="l"/>
-        <c:numFmt formatCode="General" sourceLinked="1"/>
-        <c:majorTickMark val="out"/>
-        <c:minorTickMark val="none"/>
-        <c:tickLblPos val="nextTo"/>
-        <c:spPr>
-          <a:ln w="12700" cap="flat">
-            <a:noFill/>
-            <a:prstDash val="solid"/>
-            <a:round/>
-          </a:ln>
-        </c:spPr>
-        <c:txPr>
-          <a:bodyPr/>
-          <a:lstStyle/>
-          <a:p>
-            <a:pPr>
-              <a:defRPr sz="1300" b="0" i="0" u="none" strike="noStrike">
-                <a:solidFill>
-                  <a:srgbClr val="2E3440"/>
-                </a:solidFill>
-                <a:latin typeface="Meiryo UI"/>
-              </a:defRPr>
-            </a:pPr>
-            <a:endParaRPr lang="en-US"/>
-          </a:p>
-        </c:txPr>
-        <c:crossAx val="2094734552"/>
-        <c:crosses val="autoZero"/>
-        <c:auto val="1"/>
-        <c:lblAlgn val="ctr"/>
-        <c:noMultiLvlLbl val="1"/>
-      </c:catAx>
-      <c:valAx>
-        <c:axId val="2094734552"/>
-        <c:scaling>
-          <c:orientation val="minMax"/>
-          <c:max val="75"/>
-          <c:min val="0"/>
-        </c:scaling>
-        <c:delete val="1"/>
-        <c:axPos val="b"/>
-        <c:numFmt formatCode="General" sourceLinked="0"/>
-        <c:majorTickMark val="out"/>
-        <c:minorTickMark val="none"/>
-        <c:tickLblPos val="low"/>
-        <c:spPr>
-          <a:ln w="12700" cap="flat">
-            <a:solidFill>
-              <a:srgbClr val="888888"/>
-            </a:solidFill>
-            <a:prstDash val="solid"/>
-            <a:round/>
-          </a:ln>
-        </c:spPr>
-        <c:txPr>
-          <a:bodyPr/>
-          <a:lstStyle/>
-          <a:p>
-            <a:pPr>
-              <a:defRPr sz="1200" b="0" i="0" u="none" strike="noStrike">
-                <a:solidFill>
-                  <a:srgbClr val="000000"/>
-                </a:solidFill>
-                <a:latin typeface="Arial"/>
-              </a:defRPr>
-            </a:pPr>
-            <a:endParaRPr lang="en-US"/>
-          </a:p>
-        </c:txPr>
-        <c:crossAx val="2094734554"/>
-        <c:crosses val="autoZero"/>
-        <c:crossBetween val="between"/>
-      </c:valAx>
-      <c:spPr>
-        <a:noFill/>
-        <a:ln>
-          <a:noFill/>
-        </a:ln>
-        <a:effectLst/>
-      </c:spPr>
-    </c:plotArea>
-    <c:plotVisOnly val="1"/>
-    <c:dispBlanksAs val="span"/>
-  </c:chart>
-  <c:spPr>
-    <a:noFill/>
-    <a:ln>
-      <a:noFill/>
-    </a:ln>
-    <a:effectLst/>
-  </c:spPr>
-  <c:externalData r:id="rId1">
-    <c:autoUpdate val="0"/>
-  </c:externalData>
-</c:chartSpace>
-</file>
-
-<file path=ppt/charts/chart2.xml><?xml version="1.0" encoding="utf-8"?>
 <c:chartSpace xmlns:c="http://schemas.openxmlformats.org/drawingml/2006/chart" xmlns:a="http://schemas.openxmlformats.org/drawingml/2006/main" xmlns:r="http://schemas.openxmlformats.org/officeDocument/2006/relationships">
   <c:date1904 val="0"/>
   <c:roundedCorners val="1"/>
@@ -1965,7 +1623,7 @@
           <a:p>
             <a:r>
               <a:rPr lang="en-US" dirty="0"/>
-              <a:t>具体的な第一歩は、愛媛での就労継続支援B型です。B型の平均工賃は全国で約2万4千円、愛媛で約2万3千円。作業の主流は企業からの軽作業で、3分の2の事業所が取り組んでいます。立ち上げ期は軽作業で仕事を確保し、施設外就労や自主製品で工賃を上げる。放デイ卒業生に合わせ、ITや接客など一般就労につながる作業も用意します。</a:t>
+              <a:t>具体的な第一歩は、愛媛での就労継続支援B型です。西条市で定員20名の事業所を開設した場合の試算です。標準シナリオでは1日18人の利用で、6か月目に単月黒字、27か月目に初期投資を回収し、3年目の営業利益は約1,140万円です。黒字ラインは1日11人前後。放デイ卒業生の受け皿になれるかが集客の土台です。</a:t>
             </a:r>
             <a:endParaRPr lang="en-US" dirty="0"/>
           </a:p>
@@ -2053,7 +1711,7 @@
           <a:p>
             <a:r>
               <a:rPr lang="en-US" dirty="0"/>
-              <a:t>西条市で定員20名の事業所を開設した場合の試算です。標準シナリオでは1日18人の利用で、6か月目に単月黒字、27か月目に初期投資を回収し、3年目の営業利益は約1,140万円です。黒字ラインは1日11人前後。放デイ卒業生の受け皿になれるかが集客の土台です。工賃が愛媛平均に届けば、さらに年間約100万円上乗せできます。</a:t>
+              <a:t>では、クロスボーダーの期間に何をするか。最初の3か月は、2つの係の業務に同行して学びながら、日吉・西条の保護者アンケートと、西条市・今治市への事前相談で、ニーズと制度のリスクを確かめます。半年までにB型の事業計画書を社内の形式で作り、受託先や特別支援学校との連携を広げます。1年までに役員へ提案し、承認いただければ開設準備へ進みます。</a:t>
             </a:r>
             <a:endParaRPr lang="en-US" dirty="0"/>
           </a:p>
@@ -7826,7 +7484,7 @@
                 <a:ea typeface="Meiryo UI" pitchFamily="34" charset="-122"/>
                 <a:cs typeface="Meiryo UI" pitchFamily="34" charset="-120"/>
               </a:rPr>
-              <a:t>ACTION</a:t>
+              <a:t>FIRST STEP</a:t>
             </a:r>
             <a:endParaRPr lang="en-US" sz="1200" dirty="0"/>
           </a:p>
@@ -7868,7 +7526,7 @@
                 <a:ea typeface="Meiryo UI" pitchFamily="34" charset="-122"/>
                 <a:cs typeface="Meiryo UI" pitchFamily="34" charset="-120"/>
               </a:rPr>
-              <a:t>まずは、愛媛に就労継続支援B型を</a:t>
+              <a:t>まずは愛媛にB型を　― 開設の試算</a:t>
             </a:r>
             <a:endParaRPr lang="en-US" sz="3000" dirty="0"/>
           </a:p>
@@ -7925,11 +7583,11 @@
         <p:spPr>
           <a:xfrm>
             <a:off x="548640" y="1600200"/>
-            <a:ext cx="5806440" cy="4114800"/>
+            <a:ext cx="6355080" cy="3657600"/>
           </a:xfrm>
           <a:prstGeom prst="roundRect">
             <a:avLst>
-              <a:gd name="adj" fmla="val 3556"/>
+              <a:gd name="adj" fmla="val 4000"/>
             </a:avLst>
           </a:prstGeom>
           <a:solidFill>
@@ -7958,7 +7616,7 @@
         </p:nvGraphicFramePr>
         <p:xfrm>
           <a:off x="685800" y="1691640"/>
-          <a:ext cx="5532120" cy="3931920"/>
+          <a:ext cx="6080760" cy="3474720"/>
         </p:xfrm>
         <a:graphic xmlns:a="http://schemas.openxmlformats.org/drawingml/2006/main">
           <a:graphicData uri="http://schemas.openxmlformats.org/drawingml/2006/chart">
@@ -7974,12 +7632,12 @@
         </p:nvSpPr>
         <p:spPr>
           <a:xfrm>
-            <a:off x="6629400" y="1600200"/>
-            <a:ext cx="2415388" cy="1371600"/>
+            <a:off x="7132320" y="1600200"/>
+            <a:ext cx="2163928" cy="1737360"/>
           </a:xfrm>
           <a:prstGeom prst="roundRect">
             <a:avLst>
-              <a:gd name="adj" fmla="val 10667"/>
+              <a:gd name="adj" fmla="val 8421"/>
             </a:avLst>
           </a:prstGeom>
           <a:solidFill>
@@ -8008,8 +7666,8 @@
         </p:nvSpPr>
         <p:spPr>
           <a:xfrm>
-            <a:off x="6720840" y="1819656"/>
-            <a:ext cx="2232508" cy="566928"/>
+            <a:off x="7223760" y="1878178"/>
+            <a:ext cx="1981048" cy="566928"/>
           </a:xfrm>
           <a:prstGeom prst="rect">
             <a:avLst/>
@@ -8023,12 +7681,12 @@
           <a:p>
             <a:pPr algn="ctr" indent="0" marL="0">
               <a:lnSpc>
-                <a:spcPts val="2400"/>
-              </a:lnSpc>
-              <a:buNone/>
-            </a:pPr>
-            <a:r>
-              <a:rPr lang="en-US" sz="2400" b="1" dirty="0">
+                <a:spcPts val="2800"/>
+              </a:lnSpc>
+              <a:buNone/>
+            </a:pPr>
+            <a:r>
+              <a:rPr lang="en-US" sz="2800" b="1" dirty="0">
                 <a:solidFill>
                   <a:srgbClr val="0B3A9E"/>
                 </a:solidFill>
@@ -8036,9 +7694,9 @@
                 <a:ea typeface="Meiryo UI" pitchFamily="34" charset="-122"/>
                 <a:cs typeface="Meiryo UI" pitchFamily="34" charset="-120"/>
               </a:rPr>
-              <a:t>24,141円</a:t>
-            </a:r>
-            <a:endParaRPr lang="en-US" sz="2400" dirty="0"/>
+              <a:t>18人</a:t>
+            </a:r>
+            <a:endParaRPr lang="en-US" sz="2800" dirty="0"/>
           </a:p>
         </p:txBody>
       </p:sp>
@@ -8050,8 +7708,8 @@
         </p:nvSpPr>
         <p:spPr>
           <a:xfrm>
-            <a:off x="6766560" y="2478024"/>
-            <a:ext cx="2141068" cy="420624"/>
+            <a:off x="7269480" y="2536546"/>
+            <a:ext cx="1889608" cy="727862"/>
           </a:xfrm>
           <a:prstGeom prst="rect">
             <a:avLst/>
@@ -8078,7 +7736,7 @@
                 <a:ea typeface="Meiryo UI" pitchFamily="34" charset="-122"/>
                 <a:cs typeface="Meiryo UI" pitchFamily="34" charset="-120"/>
               </a:rPr>
-              <a:t>全国の平均工賃</a:t>
+              <a:t>1日の平均利用者数</a:t>
             </a:r>
             <a:endParaRPr lang="en-US" sz="1200" dirty="0"/>
           </a:p>
@@ -8098,7 +7756,7 @@
                 <a:ea typeface="Meiryo UI" pitchFamily="34" charset="-122"/>
                 <a:cs typeface="Meiryo UI" pitchFamily="34" charset="-120"/>
               </a:rPr>
-              <a:t>（月額・令和6年度）</a:t>
+              <a:t>（安定期）</a:t>
             </a:r>
             <a:endParaRPr lang="en-US" sz="1200" dirty="0"/>
           </a:p>
@@ -8112,12 +7770,12 @@
         </p:nvSpPr>
         <p:spPr>
           <a:xfrm>
-            <a:off x="9227668" y="1600200"/>
-            <a:ext cx="2415388" cy="1371600"/>
+            <a:off x="9479128" y="1600200"/>
+            <a:ext cx="2163928" cy="1737360"/>
           </a:xfrm>
           <a:prstGeom prst="roundRect">
             <a:avLst>
-              <a:gd name="adj" fmla="val 10667"/>
+              <a:gd name="adj" fmla="val 8421"/>
             </a:avLst>
           </a:prstGeom>
           <a:solidFill>
@@ -8146,8 +7804,8 @@
         </p:nvSpPr>
         <p:spPr>
           <a:xfrm>
-            <a:off x="9319108" y="1819656"/>
-            <a:ext cx="2232508" cy="566928"/>
+            <a:off x="9570568" y="1878178"/>
+            <a:ext cx="1981048" cy="566928"/>
           </a:xfrm>
           <a:prstGeom prst="rect">
             <a:avLst/>
@@ -8161,6 +7819,242 @@
           <a:p>
             <a:pPr algn="ctr" indent="0" marL="0">
               <a:lnSpc>
+                <a:spcPts val="2800"/>
+              </a:lnSpc>
+              <a:buNone/>
+            </a:pPr>
+            <a:r>
+              <a:rPr lang="en-US" sz="2800" b="1" dirty="0">
+                <a:solidFill>
+                  <a:srgbClr val="1F5FD6"/>
+                </a:solidFill>
+                <a:latin typeface="Meiryo UI" pitchFamily="34" charset="0"/>
+                <a:ea typeface="Meiryo UI" pitchFamily="34" charset="-122"/>
+                <a:cs typeface="Meiryo UI" pitchFamily="34" charset="-120"/>
+              </a:rPr>
+              <a:t>6か月目</a:t>
+            </a:r>
+            <a:endParaRPr lang="en-US" sz="2800" dirty="0"/>
+          </a:p>
+        </p:txBody>
+      </p:sp>
+      <p:sp>
+        <p:nvSpPr>
+          <p:cNvPr id="12" name="Text 9"/>
+          <p:cNvSpPr txBox="1"/>
+          <p:nvPr/>
+        </p:nvSpPr>
+        <p:spPr>
+          <a:xfrm>
+            <a:off x="9616288" y="2536546"/>
+            <a:ext cx="1889608" cy="727862"/>
+          </a:xfrm>
+          <a:prstGeom prst="rect">
+            <a:avLst/>
+          </a:prstGeom>
+          <a:noFill/>
+          <a:ln/>
+        </p:spPr>
+        <p:txBody>
+          <a:bodyPr wrap="square" lIns="0" tIns="0" rIns="0" bIns="0" rtlCol="0" anchor="t"/>
+          <a:lstStyle/>
+          <a:p>
+            <a:pPr algn="ctr" indent="0" marL="0">
+              <a:lnSpc>
+                <a:spcPts val="1560"/>
+              </a:lnSpc>
+              <a:buNone/>
+            </a:pPr>
+            <a:r>
+              <a:rPr lang="en-US" sz="1200" dirty="0">
+                <a:solidFill>
+                  <a:srgbClr val="5B6472"/>
+                </a:solidFill>
+                <a:latin typeface="Meiryo UI" pitchFamily="34" charset="0"/>
+                <a:ea typeface="Meiryo UI" pitchFamily="34" charset="-122"/>
+                <a:cs typeface="Meiryo UI" pitchFamily="34" charset="-120"/>
+              </a:rPr>
+              <a:t>単月で黒字化</a:t>
+            </a:r>
+            <a:endParaRPr lang="en-US" sz="1200" dirty="0"/>
+          </a:p>
+        </p:txBody>
+      </p:sp>
+      <p:sp>
+        <p:nvSpPr>
+          <p:cNvPr id="13" name="Shape 10"/>
+          <p:cNvSpPr/>
+          <p:nvPr/>
+        </p:nvSpPr>
+        <p:spPr>
+          <a:xfrm>
+            <a:off x="7132320" y="3520440"/>
+            <a:ext cx="2163928" cy="1737360"/>
+          </a:xfrm>
+          <a:prstGeom prst="roundRect">
+            <a:avLst>
+              <a:gd name="adj" fmla="val 8421"/>
+            </a:avLst>
+          </a:prstGeom>
+          <a:solidFill>
+            <a:srgbClr val="F4F8FF"/>
+          </a:solidFill>
+          <a:ln w="6350">
+            <a:solidFill>
+              <a:srgbClr val="F4F8FF"/>
+            </a:solidFill>
+            <a:prstDash val="solid"/>
+          </a:ln>
+          <a:effectLst>
+            <a:outerShdw sx="100000" sy="100000" kx="0" ky="0" algn="bl" rotWithShape="0" blurRad="127000" dist="38100" dir="5400000">
+              <a:srgbClr val="1F4FB0">
+                <a:alpha val="14000"/>
+              </a:srgbClr>
+            </a:outerShdw>
+          </a:effectLst>
+        </p:spPr>
+      </p:sp>
+      <p:sp>
+        <p:nvSpPr>
+          <p:cNvPr id="14" name="Text 11"/>
+          <p:cNvSpPr txBox="1"/>
+          <p:nvPr/>
+        </p:nvSpPr>
+        <p:spPr>
+          <a:xfrm>
+            <a:off x="7223760" y="3798418"/>
+            <a:ext cx="1981048" cy="566928"/>
+          </a:xfrm>
+          <a:prstGeom prst="rect">
+            <a:avLst/>
+          </a:prstGeom>
+          <a:noFill/>
+          <a:ln/>
+        </p:spPr>
+        <p:txBody>
+          <a:bodyPr wrap="square" lIns="0" tIns="0" rIns="0" bIns="0" rtlCol="0" anchor="ctr"/>
+          <a:lstStyle/>
+          <a:p>
+            <a:pPr algn="ctr" indent="0" marL="0">
+              <a:lnSpc>
+                <a:spcPts val="2800"/>
+              </a:lnSpc>
+              <a:buNone/>
+            </a:pPr>
+            <a:r>
+              <a:rPr lang="en-US" sz="2800" b="1" dirty="0">
+                <a:solidFill>
+                  <a:srgbClr val="2E4FD8"/>
+                </a:solidFill>
+                <a:latin typeface="Meiryo UI" pitchFamily="34" charset="0"/>
+                <a:ea typeface="Meiryo UI" pitchFamily="34" charset="-122"/>
+                <a:cs typeface="Meiryo UI" pitchFamily="34" charset="-120"/>
+              </a:rPr>
+              <a:t>27か月目</a:t>
+            </a:r>
+            <a:endParaRPr lang="en-US" sz="2800" dirty="0"/>
+          </a:p>
+        </p:txBody>
+      </p:sp>
+      <p:sp>
+        <p:nvSpPr>
+          <p:cNvPr id="15" name="Text 12"/>
+          <p:cNvSpPr txBox="1"/>
+          <p:nvPr/>
+        </p:nvSpPr>
+        <p:spPr>
+          <a:xfrm>
+            <a:off x="7269480" y="4456786"/>
+            <a:ext cx="1889608" cy="727862"/>
+          </a:xfrm>
+          <a:prstGeom prst="rect">
+            <a:avLst/>
+          </a:prstGeom>
+          <a:noFill/>
+          <a:ln/>
+        </p:spPr>
+        <p:txBody>
+          <a:bodyPr wrap="square" lIns="0" tIns="0" rIns="0" bIns="0" rtlCol="0" anchor="t"/>
+          <a:lstStyle/>
+          <a:p>
+            <a:pPr algn="ctr" indent="0" marL="0">
+              <a:lnSpc>
+                <a:spcPts val="1560"/>
+              </a:lnSpc>
+              <a:buNone/>
+            </a:pPr>
+            <a:r>
+              <a:rPr lang="en-US" sz="1200" dirty="0">
+                <a:solidFill>
+                  <a:srgbClr val="5B6472"/>
+                </a:solidFill>
+                <a:latin typeface="Meiryo UI" pitchFamily="34" charset="0"/>
+                <a:ea typeface="Meiryo UI" pitchFamily="34" charset="-122"/>
+                <a:cs typeface="Meiryo UI" pitchFamily="34" charset="-120"/>
+              </a:rPr>
+              <a:t>初期投資900万円を回収</a:t>
+            </a:r>
+            <a:endParaRPr lang="en-US" sz="1200" dirty="0"/>
+          </a:p>
+        </p:txBody>
+      </p:sp>
+      <p:sp>
+        <p:nvSpPr>
+          <p:cNvPr id="16" name="Shape 13"/>
+          <p:cNvSpPr/>
+          <p:nvPr/>
+        </p:nvSpPr>
+        <p:spPr>
+          <a:xfrm>
+            <a:off x="9479128" y="3520440"/>
+            <a:ext cx="2163928" cy="1737360"/>
+          </a:xfrm>
+          <a:prstGeom prst="roundRect">
+            <a:avLst>
+              <a:gd name="adj" fmla="val 8421"/>
+            </a:avLst>
+          </a:prstGeom>
+          <a:solidFill>
+            <a:srgbClr val="F4F8FF"/>
+          </a:solidFill>
+          <a:ln w="6350">
+            <a:solidFill>
+              <a:srgbClr val="F4F8FF"/>
+            </a:solidFill>
+            <a:prstDash val="solid"/>
+          </a:ln>
+          <a:effectLst>
+            <a:outerShdw sx="100000" sy="100000" kx="0" ky="0" algn="bl" rotWithShape="0" blurRad="127000" dist="38100" dir="5400000">
+              <a:srgbClr val="1F4FB0">
+                <a:alpha val="14000"/>
+              </a:srgbClr>
+            </a:outerShdw>
+          </a:effectLst>
+        </p:spPr>
+      </p:sp>
+      <p:sp>
+        <p:nvSpPr>
+          <p:cNvPr id="17" name="Text 14"/>
+          <p:cNvSpPr txBox="1"/>
+          <p:nvPr/>
+        </p:nvSpPr>
+        <p:spPr>
+          <a:xfrm>
+            <a:off x="9570568" y="3798418"/>
+            <a:ext cx="1981048" cy="566928"/>
+          </a:xfrm>
+          <a:prstGeom prst="rect">
+            <a:avLst/>
+          </a:prstGeom>
+          <a:noFill/>
+          <a:ln/>
+        </p:spPr>
+        <p:txBody>
+          <a:bodyPr wrap="square" lIns="0" tIns="0" rIns="0" bIns="0" rtlCol="0" anchor="ctr"/>
+          <a:lstStyle/>
+          <a:p>
+            <a:pPr algn="ctr" indent="0" marL="0">
+              <a:lnSpc>
                 <a:spcPts val="2400"/>
               </a:lnSpc>
               <a:buNone/>
@@ -8174,7 +8068,7 @@
                 <a:ea typeface="Meiryo UI" pitchFamily="34" charset="-122"/>
                 <a:cs typeface="Meiryo UI" pitchFamily="34" charset="-120"/>
               </a:rPr>
-              <a:t>23,396円</a:t>
+              <a:t>1,140万円</a:t>
             </a:r>
             <a:endParaRPr lang="en-US" sz="2400" dirty="0"/>
           </a:p>
@@ -8182,14 +8076,14 @@
       </p:sp>
       <p:sp>
         <p:nvSpPr>
-          <p:cNvPr id="12" name="Text 9"/>
-          <p:cNvSpPr txBox="1"/>
-          <p:nvPr/>
-        </p:nvSpPr>
-        <p:spPr>
-          <a:xfrm>
-            <a:off x="9364828" y="2478024"/>
-            <a:ext cx="2141068" cy="420624"/>
+          <p:cNvPr id="18" name="Text 15"/>
+          <p:cNvSpPr txBox="1"/>
+          <p:nvPr/>
+        </p:nvSpPr>
+        <p:spPr>
+          <a:xfrm>
+            <a:off x="9616288" y="4456786"/>
+            <a:ext cx="1889608" cy="727862"/>
           </a:xfrm>
           <a:prstGeom prst="rect">
             <a:avLst/>
@@ -8216,7 +8110,7 @@
                 <a:ea typeface="Meiryo UI" pitchFamily="34" charset="-122"/>
                 <a:cs typeface="Meiryo UI" pitchFamily="34" charset="-120"/>
               </a:rPr>
-              <a:t>愛媛の平均工賃</a:t>
+              <a:t>3年目の営業利益</a:t>
             </a:r>
             <a:endParaRPr lang="en-US" sz="1200" dirty="0"/>
           </a:p>
@@ -8236,57 +8130,15 @@
                 <a:ea typeface="Meiryo UI" pitchFamily="34" charset="-122"/>
                 <a:cs typeface="Meiryo UI" pitchFamily="34" charset="-120"/>
               </a:rPr>
-              <a:t>（令和6年度・253事業所）</a:t>
+              <a:t>（概算）</a:t>
             </a:r>
             <a:endParaRPr lang="en-US" sz="1200" dirty="0"/>
-          </a:p>
-        </p:txBody>
-      </p:sp>
-      <p:sp>
-        <p:nvSpPr>
-          <p:cNvPr id="13" name="Text 10"/>
-          <p:cNvSpPr txBox="1"/>
-          <p:nvPr/>
-        </p:nvSpPr>
-        <p:spPr>
-          <a:xfrm>
-            <a:off x="6629400" y="3200400"/>
-            <a:ext cx="5013655" cy="365760"/>
-          </a:xfrm>
-          <a:prstGeom prst="rect">
-            <a:avLst/>
-          </a:prstGeom>
-          <a:noFill/>
-          <a:ln/>
-        </p:spPr>
-        <p:txBody>
-          <a:bodyPr wrap="square" lIns="0" tIns="0" rIns="0" bIns="0" rtlCol="0" anchor="ctr"/>
-          <a:lstStyle/>
-          <a:p>
-            <a:pPr indent="0" marL="0">
-              <a:lnSpc>
-                <a:spcPts val="2210"/>
-              </a:lnSpc>
-              <a:buNone/>
-            </a:pPr>
-            <a:r>
-              <a:rPr lang="en-US" sz="1700" b="1" dirty="0">
-                <a:solidFill>
-                  <a:srgbClr val="2E3440"/>
-                </a:solidFill>
-                <a:latin typeface="Meiryo UI" pitchFamily="34" charset="0"/>
-                <a:ea typeface="Meiryo UI" pitchFamily="34" charset="-122"/>
-                <a:cs typeface="Meiryo UI" pitchFamily="34" charset="-120"/>
-              </a:rPr>
-              <a:t>私たちの作業設計</a:t>
-            </a:r>
-            <a:endParaRPr lang="en-US" sz="1700" dirty="0"/>
           </a:p>
         </p:txBody>
       </p:sp>
       <p:pic>
         <p:nvPicPr>
-          <p:cNvPr id="14" name="Image 0" descr="/home/user/-/presentation/candidates/assets/orb_1.png">    </p:cNvPr>
+          <p:cNvPr id="19" name="Image 0" descr="/home/user/-/presentation/candidates/assets/orb_5.png">    </p:cNvPr>
           <p:cNvPicPr>
             <a:picLocks noChangeAspect="1"/>
           </p:cNvPicPr>
@@ -8300,48 +8152,66 @@
         </p:blipFill>
         <p:spPr>
           <a:xfrm>
-            <a:off x="6629400" y="3703320"/>
-            <a:ext cx="512064" cy="512064"/>
+            <a:off x="548640" y="5596128"/>
+            <a:ext cx="219456" cy="219456"/>
           </a:xfrm>
           <a:prstGeom prst="rect">
             <a:avLst/>
           </a:prstGeom>
         </p:spPr>
       </p:pic>
-      <p:pic>
-        <p:nvPicPr>
-          <p:cNvPr id="15" name="Image 1" descr="preencoded.png">    </p:cNvPr>
-          <p:cNvPicPr>
-            <a:picLocks noChangeAspect="1"/>
-          </p:cNvPicPr>
-          <p:nvPr/>
-        </p:nvPicPr>
-        <p:blipFill>
-          <a:blip r:embed="rId3"/>
-          <a:stretch>
-            <a:fillRect/>
-          </a:stretch>
-        </p:blipFill>
-        <p:spPr>
-          <a:xfrm>
-            <a:off x="6752295" y="3826215"/>
-            <a:ext cx="266273" cy="266273"/>
-          </a:xfrm>
-          <a:prstGeom prst="rect">
-            <a:avLst/>
-          </a:prstGeom>
-        </p:spPr>
-      </p:pic>
-      <p:sp>
-        <p:nvSpPr>
-          <p:cNvPr id="16" name="Text 11"/>
-          <p:cNvSpPr txBox="1"/>
-          <p:nvPr/>
-        </p:nvSpPr>
-        <p:spPr>
-          <a:xfrm>
-            <a:off x="7287768" y="3675888"/>
-            <a:ext cx="4355287" cy="274320"/>
+      <p:sp>
+        <p:nvSpPr>
+          <p:cNvPr id="20" name="Text 16"/>
+          <p:cNvSpPr txBox="1"/>
+          <p:nvPr/>
+        </p:nvSpPr>
+        <p:spPr>
+          <a:xfrm>
+            <a:off x="932688" y="5468112"/>
+            <a:ext cx="10710367" cy="475488"/>
+          </a:xfrm>
+          <a:prstGeom prst="rect">
+            <a:avLst/>
+          </a:prstGeom>
+          <a:noFill/>
+          <a:ln/>
+        </p:spPr>
+        <p:txBody>
+          <a:bodyPr wrap="square" lIns="0" tIns="0" rIns="0" bIns="0" rtlCol="0" anchor="ctr"/>
+          <a:lstStyle/>
+          <a:p>
+            <a:pPr indent="0" marL="0">
+              <a:lnSpc>
+                <a:spcPts val="2210"/>
+              </a:lnSpc>
+              <a:buNone/>
+            </a:pPr>
+            <a:r>
+              <a:rPr lang="en-US" sz="1700" b="1" dirty="0">
+                <a:solidFill>
+                  <a:srgbClr val="0B3A9E"/>
+                </a:solidFill>
+                <a:latin typeface="Meiryo UI" pitchFamily="34" charset="0"/>
+                <a:ea typeface="Meiryo UI" pitchFamily="34" charset="-122"/>
+                <a:cs typeface="Meiryo UI" pitchFamily="34" charset="-120"/>
+              </a:rPr>
+              <a:t>黒字ラインは1日11人前後。工賃が愛媛平均（2.3万円）に届けば、年間約100万円の上乗せ。</a:t>
+            </a:r>
+            <a:endParaRPr lang="en-US" sz="1700" dirty="0"/>
+          </a:p>
+        </p:txBody>
+      </p:sp>
+      <p:sp>
+        <p:nvSpPr>
+          <p:cNvPr id="21" name="Text 17"/>
+          <p:cNvSpPr txBox="1"/>
+          <p:nvPr/>
+        </p:nvSpPr>
+        <p:spPr>
+          <a:xfrm>
+            <a:off x="548640" y="6035040"/>
+            <a:ext cx="11094415" cy="256032"/>
           </a:xfrm>
           <a:prstGeom prst="rect">
             <a:avLst/>
@@ -8355,354 +8225,6 @@
           <a:p>
             <a:pPr indent="0" marL="0">
               <a:lnSpc>
-                <a:spcPts val="1540"/>
-              </a:lnSpc>
-              <a:buNone/>
-            </a:pPr>
-            <a:r>
-              <a:rPr lang="en-US" sz="1400" b="1" dirty="0">
-                <a:solidFill>
-                  <a:srgbClr val="2E3440"/>
-                </a:solidFill>
-                <a:latin typeface="Meiryo UI" pitchFamily="34" charset="0"/>
-                <a:ea typeface="Meiryo UI" pitchFamily="34" charset="-122"/>
-                <a:cs typeface="Meiryo UI" pitchFamily="34" charset="-120"/>
-              </a:rPr>
-              <a:t>立ち上げ期</a:t>
-            </a:r>
-            <a:endParaRPr lang="en-US" sz="1400" dirty="0"/>
-          </a:p>
-        </p:txBody>
-      </p:sp>
-      <p:sp>
-        <p:nvSpPr>
-          <p:cNvPr id="17" name="Text 12"/>
-          <p:cNvSpPr txBox="1"/>
-          <p:nvPr/>
-        </p:nvSpPr>
-        <p:spPr>
-          <a:xfrm>
-            <a:off x="7287768" y="3968496"/>
-            <a:ext cx="4355287" cy="292608"/>
-          </a:xfrm>
-          <a:prstGeom prst="rect">
-            <a:avLst/>
-          </a:prstGeom>
-          <a:noFill/>
-          <a:ln/>
-        </p:spPr>
-        <p:txBody>
-          <a:bodyPr wrap="square" lIns="0" tIns="0" rIns="0" bIns="0" rtlCol="0" anchor="t"/>
-          <a:lstStyle/>
-          <a:p>
-            <a:pPr indent="0" marL="0">
-              <a:lnSpc>
-                <a:spcPts val="1430"/>
-              </a:lnSpc>
-              <a:buNone/>
-            </a:pPr>
-            <a:r>
-              <a:rPr lang="en-US" sz="1300" dirty="0">
-                <a:solidFill>
-                  <a:srgbClr val="5B6472"/>
-                </a:solidFill>
-                <a:latin typeface="Meiryo UI" pitchFamily="34" charset="0"/>
-                <a:ea typeface="Meiryo UI" pitchFamily="34" charset="-122"/>
-                <a:cs typeface="Meiryo UI" pitchFamily="34" charset="-120"/>
-              </a:rPr>
-              <a:t>企業からの軽作業（検品・袋詰めなど）で仕事を確保</a:t>
-            </a:r>
-            <a:endParaRPr lang="en-US" sz="1300" dirty="0"/>
-          </a:p>
-        </p:txBody>
-      </p:sp>
-      <p:pic>
-        <p:nvPicPr>
-          <p:cNvPr id="18" name="Image 2" descr="/home/user/-/presentation/candidates/assets/orb_3.png">    </p:cNvPr>
-          <p:cNvPicPr>
-            <a:picLocks noChangeAspect="1"/>
-          </p:cNvPicPr>
-          <p:nvPr/>
-        </p:nvPicPr>
-        <p:blipFill>
-          <a:blip r:embed="rId4"/>
-          <a:stretch>
-            <a:fillRect/>
-          </a:stretch>
-        </p:blipFill>
-        <p:spPr>
-          <a:xfrm>
-            <a:off x="6629400" y="4416552"/>
-            <a:ext cx="512064" cy="512064"/>
-          </a:xfrm>
-          <a:prstGeom prst="rect">
-            <a:avLst/>
-          </a:prstGeom>
-        </p:spPr>
-      </p:pic>
-      <p:pic>
-        <p:nvPicPr>
-          <p:cNvPr id="19" name="Image 3" descr="preencoded.png">    </p:cNvPr>
-          <p:cNvPicPr>
-            <a:picLocks noChangeAspect="1"/>
-          </p:cNvPicPr>
-          <p:nvPr/>
-        </p:nvPicPr>
-        <p:blipFill>
-          <a:blip r:embed="rId5"/>
-          <a:stretch>
-            <a:fillRect/>
-          </a:stretch>
-        </p:blipFill>
-        <p:spPr>
-          <a:xfrm>
-            <a:off x="6752295" y="4539447"/>
-            <a:ext cx="266273" cy="266273"/>
-          </a:xfrm>
-          <a:prstGeom prst="rect">
-            <a:avLst/>
-          </a:prstGeom>
-        </p:spPr>
-      </p:pic>
-      <p:sp>
-        <p:nvSpPr>
-          <p:cNvPr id="20" name="Text 13"/>
-          <p:cNvSpPr txBox="1"/>
-          <p:nvPr/>
-        </p:nvSpPr>
-        <p:spPr>
-          <a:xfrm>
-            <a:off x="7287768" y="4389120"/>
-            <a:ext cx="4355287" cy="274320"/>
-          </a:xfrm>
-          <a:prstGeom prst="rect">
-            <a:avLst/>
-          </a:prstGeom>
-          <a:noFill/>
-          <a:ln/>
-        </p:spPr>
-        <p:txBody>
-          <a:bodyPr wrap="square" lIns="0" tIns="0" rIns="0" bIns="0" rtlCol="0" anchor="t"/>
-          <a:lstStyle/>
-          <a:p>
-            <a:pPr indent="0" marL="0">
-              <a:lnSpc>
-                <a:spcPts val="1540"/>
-              </a:lnSpc>
-              <a:buNone/>
-            </a:pPr>
-            <a:r>
-              <a:rPr lang="en-US" sz="1400" b="1" dirty="0">
-                <a:solidFill>
-                  <a:srgbClr val="2E3440"/>
-                </a:solidFill>
-                <a:latin typeface="Meiryo UI" pitchFamily="34" charset="0"/>
-                <a:ea typeface="Meiryo UI" pitchFamily="34" charset="-122"/>
-                <a:cs typeface="Meiryo UI" pitchFamily="34" charset="-120"/>
-              </a:rPr>
-              <a:t>工賃を上げる柱</a:t>
-            </a:r>
-            <a:endParaRPr lang="en-US" sz="1400" dirty="0"/>
-          </a:p>
-        </p:txBody>
-      </p:sp>
-      <p:sp>
-        <p:nvSpPr>
-          <p:cNvPr id="21" name="Text 14"/>
-          <p:cNvSpPr txBox="1"/>
-          <p:nvPr/>
-        </p:nvSpPr>
-        <p:spPr>
-          <a:xfrm>
-            <a:off x="7287768" y="4681728"/>
-            <a:ext cx="4355287" cy="292608"/>
-          </a:xfrm>
-          <a:prstGeom prst="rect">
-            <a:avLst/>
-          </a:prstGeom>
-          <a:noFill/>
-          <a:ln/>
-        </p:spPr>
-        <p:txBody>
-          <a:bodyPr wrap="square" lIns="0" tIns="0" rIns="0" bIns="0" rtlCol="0" anchor="t"/>
-          <a:lstStyle/>
-          <a:p>
-            <a:pPr indent="0" marL="0">
-              <a:lnSpc>
-                <a:spcPts val="1430"/>
-              </a:lnSpc>
-              <a:buNone/>
-            </a:pPr>
-            <a:r>
-              <a:rPr lang="en-US" sz="1300" dirty="0">
-                <a:solidFill>
-                  <a:srgbClr val="5B6472"/>
-                </a:solidFill>
-                <a:latin typeface="Meiryo UI" pitchFamily="34" charset="0"/>
-                <a:ea typeface="Meiryo UI" pitchFamily="34" charset="-122"/>
-                <a:cs typeface="Meiryo UI" pitchFamily="34" charset="-120"/>
-              </a:rPr>
-              <a:t>施設外就労（清掃・農福連携）や自主製品（菓子など）</a:t>
-            </a:r>
-            <a:endParaRPr lang="en-US" sz="1300" dirty="0"/>
-          </a:p>
-        </p:txBody>
-      </p:sp>
-      <p:pic>
-        <p:nvPicPr>
-          <p:cNvPr id="22" name="Image 4" descr="/home/user/-/presentation/candidates/assets/orb_4.png">    </p:cNvPr>
-          <p:cNvPicPr>
-            <a:picLocks noChangeAspect="1"/>
-          </p:cNvPicPr>
-          <p:nvPr/>
-        </p:nvPicPr>
-        <p:blipFill>
-          <a:blip r:embed="rId6"/>
-          <a:stretch>
-            <a:fillRect/>
-          </a:stretch>
-        </p:blipFill>
-        <p:spPr>
-          <a:xfrm>
-            <a:off x="6629400" y="5129784"/>
-            <a:ext cx="512064" cy="512064"/>
-          </a:xfrm>
-          <a:prstGeom prst="rect">
-            <a:avLst/>
-          </a:prstGeom>
-        </p:spPr>
-      </p:pic>
-      <p:pic>
-        <p:nvPicPr>
-          <p:cNvPr id="23" name="Image 5" descr="preencoded.png">    </p:cNvPr>
-          <p:cNvPicPr>
-            <a:picLocks noChangeAspect="1"/>
-          </p:cNvPicPr>
-          <p:nvPr/>
-        </p:nvPicPr>
-        <p:blipFill>
-          <a:blip r:embed="rId7"/>
-          <a:stretch>
-            <a:fillRect/>
-          </a:stretch>
-        </p:blipFill>
-        <p:spPr>
-          <a:xfrm>
-            <a:off x="6752295" y="5252679"/>
-            <a:ext cx="266273" cy="266273"/>
-          </a:xfrm>
-          <a:prstGeom prst="rect">
-            <a:avLst/>
-          </a:prstGeom>
-        </p:spPr>
-      </p:pic>
-      <p:sp>
-        <p:nvSpPr>
-          <p:cNvPr id="24" name="Text 15"/>
-          <p:cNvSpPr txBox="1"/>
-          <p:nvPr/>
-        </p:nvSpPr>
-        <p:spPr>
-          <a:xfrm>
-            <a:off x="7287768" y="5102352"/>
-            <a:ext cx="4355287" cy="274320"/>
-          </a:xfrm>
-          <a:prstGeom prst="rect">
-            <a:avLst/>
-          </a:prstGeom>
-          <a:noFill/>
-          <a:ln/>
-        </p:spPr>
-        <p:txBody>
-          <a:bodyPr wrap="square" lIns="0" tIns="0" rIns="0" bIns="0" rtlCol="0" anchor="t"/>
-          <a:lstStyle/>
-          <a:p>
-            <a:pPr indent="0" marL="0">
-              <a:lnSpc>
-                <a:spcPts val="1540"/>
-              </a:lnSpc>
-              <a:buNone/>
-            </a:pPr>
-            <a:r>
-              <a:rPr lang="en-US" sz="1400" b="1" dirty="0">
-                <a:solidFill>
-                  <a:srgbClr val="2E3440"/>
-                </a:solidFill>
-                <a:latin typeface="Meiryo UI" pitchFamily="34" charset="0"/>
-                <a:ea typeface="Meiryo UI" pitchFamily="34" charset="-122"/>
-                <a:cs typeface="Meiryo UI" pitchFamily="34" charset="-120"/>
-              </a:rPr>
-              <a:t>放デイ卒業生に合わせて</a:t>
-            </a:r>
-            <a:endParaRPr lang="en-US" sz="1400" dirty="0"/>
-          </a:p>
-        </p:txBody>
-      </p:sp>
-      <p:sp>
-        <p:nvSpPr>
-          <p:cNvPr id="25" name="Text 16"/>
-          <p:cNvSpPr txBox="1"/>
-          <p:nvPr/>
-        </p:nvSpPr>
-        <p:spPr>
-          <a:xfrm>
-            <a:off x="7287768" y="5394960"/>
-            <a:ext cx="4355287" cy="292608"/>
-          </a:xfrm>
-          <a:prstGeom prst="rect">
-            <a:avLst/>
-          </a:prstGeom>
-          <a:noFill/>
-          <a:ln/>
-        </p:spPr>
-        <p:txBody>
-          <a:bodyPr wrap="square" lIns="0" tIns="0" rIns="0" bIns="0" rtlCol="0" anchor="t"/>
-          <a:lstStyle/>
-          <a:p>
-            <a:pPr indent="0" marL="0">
-              <a:lnSpc>
-                <a:spcPts val="1430"/>
-              </a:lnSpc>
-              <a:buNone/>
-            </a:pPr>
-            <a:r>
-              <a:rPr lang="en-US" sz="1300" dirty="0">
-                <a:solidFill>
-                  <a:srgbClr val="5B6472"/>
-                </a:solidFill>
-                <a:latin typeface="Meiryo UI" pitchFamily="34" charset="0"/>
-                <a:ea typeface="Meiryo UI" pitchFamily="34" charset="-122"/>
-                <a:cs typeface="Meiryo UI" pitchFamily="34" charset="-120"/>
-              </a:rPr>
-              <a:t>IT・PC作業や接客など、一般就労につながる作業</a:t>
-            </a:r>
-            <a:endParaRPr lang="en-US" sz="1300" dirty="0"/>
-          </a:p>
-        </p:txBody>
-      </p:sp>
-      <p:sp>
-        <p:nvSpPr>
-          <p:cNvPr id="26" name="Text 17"/>
-          <p:cNvSpPr txBox="1"/>
-          <p:nvPr/>
-        </p:nvSpPr>
-        <p:spPr>
-          <a:xfrm>
-            <a:off x="548640" y="5897880"/>
-            <a:ext cx="11094415" cy="274320"/>
-          </a:xfrm>
-          <a:prstGeom prst="rect">
-            <a:avLst/>
-          </a:prstGeom>
-          <a:noFill/>
-          <a:ln/>
-        </p:spPr>
-        <p:txBody>
-          <a:bodyPr wrap="square" lIns="0" tIns="0" rIns="0" bIns="0" rtlCol="0" anchor="t"/>
-          <a:lstStyle/>
-          <a:p>
-            <a:pPr indent="0" marL="0">
-              <a:lnSpc>
                 <a:spcPts val="1100"/>
               </a:lnSpc>
               <a:buNone/>
@@ -8716,7 +8238,7 @@
                 <a:ea typeface="Meiryo UI" pitchFamily="34" charset="-122"/>
                 <a:cs typeface="Meiryo UI" pitchFamily="34" charset="-120"/>
               </a:rPr>
-              <a:t>出典：厚生労働省「工賃（賃金）の実績」（令和6年度）・「生産活動の活性化に関する調査研究」（令和5年度）、愛媛県「月額平均工賃」（令和6年度）</a:t>
+              <a:t>※西条市・定員20名・2027年4月開設・初期投資900万円の標準シナリオ。人件費・家賃は仮置き。報酬は令和8年6月の見直しと新規指定の特例（984/1000）を反映。</a:t>
             </a:r>
             <a:endParaRPr lang="en-US" sz="1000" dirty="0"/>
           </a:p>
@@ -8783,7 +8305,7 @@
                 <a:ea typeface="Meiryo UI" pitchFamily="34" charset="-122"/>
                 <a:cs typeface="Meiryo UI" pitchFamily="34" charset="-120"/>
               </a:rPr>
-              <a:t>SIMULATION</a:t>
+              <a:t>ACTION PLAN</a:t>
             </a:r>
             <a:endParaRPr lang="en-US" sz="1200" dirty="0"/>
           </a:p>
@@ -8825,7 +8347,7 @@
                 <a:ea typeface="Meiryo UI" pitchFamily="34" charset="-122"/>
                 <a:cs typeface="Meiryo UI" pitchFamily="34" charset="-120"/>
               </a:rPr>
-              <a:t>B型開設の試算（西条市・定員20名）</a:t>
+              <a:t>クロスボーダー期間の行動計画</a:t>
             </a:r>
             <a:endParaRPr lang="en-US" sz="3000" dirty="0"/>
           </a:p>
@@ -8882,11 +8404,11 @@
         <p:spPr>
           <a:xfrm>
             <a:off x="548640" y="1600200"/>
-            <a:ext cx="6355080" cy="3657600"/>
+            <a:ext cx="2606040" cy="3749040"/>
           </a:xfrm>
           <a:prstGeom prst="roundRect">
             <a:avLst>
-              <a:gd name="adj" fmla="val 4000"/>
+              <a:gd name="adj" fmla="val 5614"/>
             </a:avLst>
           </a:prstGeom>
           <a:solidFill>
@@ -8907,36 +8429,448 @@
           </a:effectLst>
         </p:spPr>
       </p:sp>
-      <p:graphicFrame>
-        <p:nvGraphicFramePr>
-          <p:cNvPr id="6" name="Chart 0" descr=""/>
-          <p:cNvGraphicFramePr/>
-          <p:nvPr/>
-        </p:nvGraphicFramePr>
-        <p:xfrm>
-          <a:off x="685800" y="1691640"/>
-          <a:ext cx="6080760" cy="3474720"/>
-        </p:xfrm>
-        <a:graphic xmlns:a="http://schemas.openxmlformats.org/drawingml/2006/main">
-          <a:graphicData uri="http://schemas.openxmlformats.org/drawingml/2006/chart">
-            <c:chart xmlns:c="http://schemas.openxmlformats.org/drawingml/2006/chart" r:id="rId1"/>
-          </a:graphicData>
-        </a:graphic>
-      </p:graphicFrame>
-      <p:sp>
-        <p:nvSpPr>
-          <p:cNvPr id="7" name="Shape 4"/>
+      <p:pic>
+        <p:nvPicPr>
+          <p:cNvPr id="6" name="Image 0" descr="/home/user/-/presentation/candidates/assets/orb_0.png">    </p:cNvPr>
+          <p:cNvPicPr>
+            <a:picLocks noChangeAspect="1"/>
+          </p:cNvPicPr>
+          <p:nvPr/>
+        </p:nvPicPr>
+        <p:blipFill>
+          <a:blip r:embed="rId1"/>
+          <a:stretch>
+            <a:fillRect/>
+          </a:stretch>
+        </p:blipFill>
+        <p:spPr>
+          <a:xfrm>
+            <a:off x="804672" y="1856232"/>
+            <a:ext cx="566928" cy="566928"/>
+          </a:xfrm>
+          <a:prstGeom prst="rect">
+            <a:avLst/>
+          </a:prstGeom>
+        </p:spPr>
+      </p:pic>
+      <p:sp>
+        <p:nvSpPr>
+          <p:cNvPr id="7" name="Text 4"/>
+          <p:cNvSpPr txBox="1"/>
+          <p:nvPr/>
+        </p:nvSpPr>
+        <p:spPr>
+          <a:xfrm>
+            <a:off x="804672" y="1856232"/>
+            <a:ext cx="566928" cy="566928"/>
+          </a:xfrm>
+          <a:prstGeom prst="rect">
+            <a:avLst/>
+          </a:prstGeom>
+          <a:noFill/>
+          <a:ln/>
+        </p:spPr>
+        <p:txBody>
+          <a:bodyPr wrap="square" lIns="0" tIns="0" rIns="0" bIns="0" rtlCol="0" anchor="ctr"/>
+          <a:lstStyle/>
+          <a:p>
+            <a:pPr algn="ctr" indent="0" marL="0">
+              <a:lnSpc>
+                <a:spcPts val="1900"/>
+              </a:lnSpc>
+              <a:buNone/>
+            </a:pPr>
+            <a:r>
+              <a:rPr lang="en-US" sz="1900" b="1" dirty="0">
+                <a:solidFill>
+                  <a:srgbClr val="FFFFFF"/>
+                </a:solidFill>
+                <a:latin typeface="Meiryo UI" pitchFamily="34" charset="0"/>
+                <a:ea typeface="Meiryo UI" pitchFamily="34" charset="-122"/>
+                <a:cs typeface="Meiryo UI" pitchFamily="34" charset="-120"/>
+              </a:rPr>
+              <a:t>1</a:t>
+            </a:r>
+            <a:endParaRPr lang="en-US" sz="1900" dirty="0"/>
+          </a:p>
+        </p:txBody>
+      </p:sp>
+      <p:sp>
+        <p:nvSpPr>
+          <p:cNvPr id="8" name="Text 5"/>
+          <p:cNvSpPr txBox="1"/>
+          <p:nvPr/>
+        </p:nvSpPr>
+        <p:spPr>
+          <a:xfrm>
+            <a:off x="1508760" y="1819656"/>
+            <a:ext cx="1554480" cy="384048"/>
+          </a:xfrm>
+          <a:prstGeom prst="rect">
+            <a:avLst/>
+          </a:prstGeom>
+          <a:noFill/>
+          <a:ln/>
+        </p:spPr>
+        <p:txBody>
+          <a:bodyPr wrap="square" lIns="0" tIns="0" rIns="0" bIns="0" rtlCol="0" anchor="ctr"/>
+          <a:lstStyle/>
+          <a:p>
+            <a:pPr indent="0" marL="0">
+              <a:lnSpc>
+                <a:spcPts val="2200"/>
+              </a:lnSpc>
+              <a:buNone/>
+            </a:pPr>
+            <a:r>
+              <a:rPr lang="en-US" sz="2000" b="1" dirty="0">
+                <a:solidFill>
+                  <a:srgbClr val="2E3440"/>
+                </a:solidFill>
+                <a:latin typeface="Meiryo UI" pitchFamily="34" charset="0"/>
+                <a:ea typeface="Meiryo UI" pitchFamily="34" charset="-122"/>
+                <a:cs typeface="Meiryo UI" pitchFamily="34" charset="-120"/>
+              </a:rPr>
+              <a:t>〜3か月</a:t>
+            </a:r>
+            <a:endParaRPr lang="en-US" sz="2000" dirty="0"/>
+          </a:p>
+        </p:txBody>
+      </p:sp>
+      <p:sp>
+        <p:nvSpPr>
+          <p:cNvPr id="9" name="Text 6"/>
+          <p:cNvSpPr txBox="1"/>
+          <p:nvPr/>
+        </p:nvSpPr>
+        <p:spPr>
+          <a:xfrm>
+            <a:off x="1508760" y="2185416"/>
+            <a:ext cx="1554480" cy="274320"/>
+          </a:xfrm>
+          <a:prstGeom prst="rect">
+            <a:avLst/>
+          </a:prstGeom>
+          <a:noFill/>
+          <a:ln/>
+        </p:spPr>
+        <p:txBody>
+          <a:bodyPr wrap="square" lIns="0" tIns="0" rIns="0" bIns="0" rtlCol="0" anchor="ctr"/>
+          <a:lstStyle/>
+          <a:p>
+            <a:pPr indent="0" marL="0">
+              <a:lnSpc>
+                <a:spcPts val="1430"/>
+              </a:lnSpc>
+              <a:buNone/>
+            </a:pPr>
+            <a:r>
+              <a:rPr lang="en-US" sz="1300" b="1" dirty="0">
+                <a:solidFill>
+                  <a:srgbClr val="0B3A9E"/>
+                </a:solidFill>
+                <a:latin typeface="Meiryo UI" pitchFamily="34" charset="0"/>
+                <a:ea typeface="Meiryo UI" pitchFamily="34" charset="-122"/>
+                <a:cs typeface="Meiryo UI" pitchFamily="34" charset="-120"/>
+              </a:rPr>
+              <a:t>学ぶ・聞く</a:t>
+            </a:r>
+            <a:endParaRPr lang="en-US" sz="1300" dirty="0"/>
+          </a:p>
+        </p:txBody>
+      </p:sp>
+      <p:sp>
+        <p:nvSpPr>
+          <p:cNvPr id="10" name="Text 7"/>
+          <p:cNvSpPr txBox="1"/>
+          <p:nvPr/>
+        </p:nvSpPr>
+        <p:spPr>
+          <a:xfrm>
+            <a:off x="804672" y="2651760"/>
+            <a:ext cx="2240280" cy="1600200"/>
+          </a:xfrm>
+          <a:prstGeom prst="rect">
+            <a:avLst/>
+          </a:prstGeom>
+          <a:noFill/>
+          <a:ln/>
+        </p:spPr>
+        <p:txBody>
+          <a:bodyPr wrap="square" lIns="0" tIns="0" rIns="0" bIns="0" rtlCol="0" anchor="t"/>
+          <a:lstStyle/>
+          <a:p>
+            <a:pPr indent="0" marL="0">
+              <a:lnSpc>
+                <a:spcPts val="1780"/>
+              </a:lnSpc>
+              <a:buNone/>
+            </a:pPr>
+            <a:r>
+              <a:rPr lang="en-US" sz="1250" dirty="0">
+                <a:solidFill>
+                  <a:srgbClr val="2E3440"/>
+                </a:solidFill>
+                <a:latin typeface="Meiryo UI" pitchFamily="34" charset="0"/>
+                <a:ea typeface="Meiryo UI" pitchFamily="34" charset="-122"/>
+                <a:cs typeface="Meiryo UI" pitchFamily="34" charset="-120"/>
+              </a:rPr>
+              <a:t>・2つの係の業務に同行</a:t>
+            </a:r>
+            <a:endParaRPr lang="en-US" sz="1250" dirty="0"/>
+          </a:p>
+          <a:p>
+            <a:pPr indent="0" marL="0">
+              <a:lnSpc>
+                <a:spcPts val="1780"/>
+              </a:lnSpc>
+              <a:buNone/>
+            </a:pPr>
+            <a:r>
+              <a:rPr lang="en-US" sz="1250" dirty="0">
+                <a:solidFill>
+                  <a:srgbClr val="2E3440"/>
+                </a:solidFill>
+                <a:latin typeface="Meiryo UI" pitchFamily="34" charset="0"/>
+                <a:ea typeface="Meiryo UI" pitchFamily="34" charset="-122"/>
+                <a:cs typeface="Meiryo UI" pitchFamily="34" charset="-120"/>
+              </a:rPr>
+              <a:t>・保護者アンケート</a:t>
+            </a:r>
+            <a:endParaRPr lang="en-US" sz="1250" dirty="0"/>
+          </a:p>
+          <a:p>
+            <a:pPr indent="0" marL="0">
+              <a:lnSpc>
+                <a:spcPts val="1780"/>
+              </a:lnSpc>
+              <a:buNone/>
+            </a:pPr>
+            <a:r>
+              <a:rPr lang="en-US" sz="1250" dirty="0">
+                <a:solidFill>
+                  <a:srgbClr val="2E3440"/>
+                </a:solidFill>
+                <a:latin typeface="Meiryo UI" pitchFamily="34" charset="0"/>
+                <a:ea typeface="Meiryo UI" pitchFamily="34" charset="-122"/>
+                <a:cs typeface="Meiryo UI" pitchFamily="34" charset="-120"/>
+              </a:rPr>
+              <a:t>　（日吉・西条）</a:t>
+            </a:r>
+            <a:endParaRPr lang="en-US" sz="1250" dirty="0"/>
+          </a:p>
+          <a:p>
+            <a:pPr indent="0" marL="0">
+              <a:lnSpc>
+                <a:spcPts val="1780"/>
+              </a:lnSpc>
+              <a:buNone/>
+            </a:pPr>
+            <a:r>
+              <a:rPr lang="en-US" sz="1250" dirty="0">
+                <a:solidFill>
+                  <a:srgbClr val="2E3440"/>
+                </a:solidFill>
+                <a:latin typeface="Meiryo UI" pitchFamily="34" charset="0"/>
+                <a:ea typeface="Meiryo UI" pitchFamily="34" charset="-122"/>
+                <a:cs typeface="Meiryo UI" pitchFamily="34" charset="-120"/>
+              </a:rPr>
+              <a:t>・西条市・今治市へ</a:t>
+            </a:r>
+            <a:endParaRPr lang="en-US" sz="1250" dirty="0"/>
+          </a:p>
+          <a:p>
+            <a:pPr indent="0" marL="0">
+              <a:lnSpc>
+                <a:spcPts val="1780"/>
+              </a:lnSpc>
+              <a:buNone/>
+            </a:pPr>
+            <a:r>
+              <a:rPr lang="en-US" sz="1250" dirty="0">
+                <a:solidFill>
+                  <a:srgbClr val="2E3440"/>
+                </a:solidFill>
+                <a:latin typeface="Meiryo UI" pitchFamily="34" charset="0"/>
+                <a:ea typeface="Meiryo UI" pitchFamily="34" charset="-122"/>
+                <a:cs typeface="Meiryo UI" pitchFamily="34" charset="-120"/>
+              </a:rPr>
+              <a:t>　事前相談</a:t>
+            </a:r>
+            <a:endParaRPr lang="en-US" sz="1250" dirty="0"/>
+          </a:p>
+        </p:txBody>
+      </p:sp>
+      <p:sp>
+        <p:nvSpPr>
+          <p:cNvPr id="11" name="Shape 8"/>
           <p:cNvSpPr/>
           <p:nvPr/>
         </p:nvSpPr>
         <p:spPr>
           <a:xfrm>
-            <a:off x="7132320" y="1600200"/>
-            <a:ext cx="2163928" cy="1737360"/>
+            <a:off x="804672" y="4343400"/>
+            <a:ext cx="868680" cy="292608"/>
           </a:xfrm>
           <a:prstGeom prst="roundRect">
             <a:avLst>
-              <a:gd name="adj" fmla="val 8421"/>
+              <a:gd name="adj" fmla="val 50000"/>
+            </a:avLst>
+          </a:prstGeom>
+          <a:solidFill>
+            <a:srgbClr val="0B3A9E"/>
+          </a:solidFill>
+          <a:ln w="6350">
+            <a:solidFill>
+              <a:srgbClr val="0B3A9E"/>
+            </a:solidFill>
+            <a:prstDash val="solid"/>
+          </a:ln>
+        </p:spPr>
+      </p:sp>
+      <p:sp>
+        <p:nvSpPr>
+          <p:cNvPr id="12" name="Text 9"/>
+          <p:cNvSpPr txBox="1"/>
+          <p:nvPr/>
+        </p:nvSpPr>
+        <p:spPr>
+          <a:xfrm>
+            <a:off x="804672" y="4343400"/>
+            <a:ext cx="868680" cy="292608"/>
+          </a:xfrm>
+          <a:prstGeom prst="rect">
+            <a:avLst/>
+          </a:prstGeom>
+          <a:noFill/>
+          <a:ln/>
+        </p:spPr>
+        <p:txBody>
+          <a:bodyPr wrap="square" lIns="0" tIns="0" rIns="0" bIns="0" rtlCol="0" anchor="ctr"/>
+          <a:lstStyle/>
+          <a:p>
+            <a:pPr algn="ctr" indent="0" marL="0">
+              <a:lnSpc>
+                <a:spcPts val="1300"/>
+              </a:lnSpc>
+              <a:buNone/>
+            </a:pPr>
+            <a:r>
+              <a:rPr lang="en-US" sz="1300" b="1" dirty="0">
+                <a:solidFill>
+                  <a:srgbClr val="FFFFFF"/>
+                </a:solidFill>
+                <a:latin typeface="Meiryo UI" pitchFamily="34" charset="0"/>
+                <a:ea typeface="Meiryo UI" pitchFamily="34" charset="-122"/>
+                <a:cs typeface="Meiryo UI" pitchFamily="34" charset="-120"/>
+              </a:rPr>
+              <a:t>成果物</a:t>
+            </a:r>
+            <a:endParaRPr lang="en-US" sz="1300" dirty="0"/>
+          </a:p>
+        </p:txBody>
+      </p:sp>
+      <p:sp>
+        <p:nvSpPr>
+          <p:cNvPr id="13" name="Text 10"/>
+          <p:cNvSpPr txBox="1"/>
+          <p:nvPr/>
+        </p:nvSpPr>
+        <p:spPr>
+          <a:xfrm>
+            <a:off x="804672" y="4709160"/>
+            <a:ext cx="2240280" cy="548640"/>
+          </a:xfrm>
+          <a:prstGeom prst="rect">
+            <a:avLst/>
+          </a:prstGeom>
+          <a:noFill/>
+          <a:ln/>
+        </p:spPr>
+        <p:txBody>
+          <a:bodyPr wrap="square" lIns="0" tIns="0" rIns="0" bIns="0" rtlCol="0" anchor="t"/>
+          <a:lstStyle/>
+          <a:p>
+            <a:pPr indent="0" marL="0">
+              <a:lnSpc>
+                <a:spcPts val="1620"/>
+              </a:lnSpc>
+              <a:buNone/>
+            </a:pPr>
+            <a:r>
+              <a:rPr lang="en-US" sz="1200" dirty="0">
+                <a:solidFill>
+                  <a:srgbClr val="5B6472"/>
+                </a:solidFill>
+                <a:latin typeface="Meiryo UI" pitchFamily="34" charset="0"/>
+                <a:ea typeface="Meiryo UI" pitchFamily="34" charset="-122"/>
+                <a:cs typeface="Meiryo UI" pitchFamily="34" charset="-120"/>
+              </a:rPr>
+              <a:t>アンケート結果</a:t>
+            </a:r>
+            <a:endParaRPr lang="en-US" sz="1200" dirty="0"/>
+          </a:p>
+          <a:p>
+            <a:pPr indent="0" marL="0">
+              <a:lnSpc>
+                <a:spcPts val="1620"/>
+              </a:lnSpc>
+              <a:buNone/>
+            </a:pPr>
+            <a:r>
+              <a:rPr lang="en-US" sz="1200" dirty="0">
+                <a:solidFill>
+                  <a:srgbClr val="5B6472"/>
+                </a:solidFill>
+                <a:latin typeface="Meiryo UI" pitchFamily="34" charset="0"/>
+                <a:ea typeface="Meiryo UI" pitchFamily="34" charset="-122"/>
+                <a:cs typeface="Meiryo UI" pitchFamily="34" charset="-120"/>
+              </a:rPr>
+              <a:t>行政ヒアリング記録</a:t>
+            </a:r>
+            <a:endParaRPr lang="en-US" sz="1200" dirty="0"/>
+          </a:p>
+        </p:txBody>
+      </p:sp>
+      <p:sp>
+        <p:nvSpPr>
+          <p:cNvPr id="14" name="Shape 11"/>
+          <p:cNvSpPr/>
+          <p:nvPr/>
+        </p:nvSpPr>
+        <p:spPr>
+          <a:xfrm>
+            <a:off x="3206953" y="3337560"/>
+            <a:ext cx="118872" cy="274320"/>
+          </a:xfrm>
+          <a:prstGeom prst="chevron">
+            <a:avLst/>
+          </a:prstGeom>
+          <a:solidFill>
+            <a:srgbClr val="B9CCF2"/>
+          </a:solidFill>
+          <a:ln w="6350">
+            <a:solidFill>
+              <a:srgbClr val="B9CCF2"/>
+            </a:solidFill>
+            <a:prstDash val="solid"/>
+          </a:ln>
+        </p:spPr>
+      </p:sp>
+      <p:sp>
+        <p:nvSpPr>
+          <p:cNvPr id="15" name="Shape 12"/>
+          <p:cNvSpPr/>
+          <p:nvPr/>
+        </p:nvSpPr>
+        <p:spPr>
+          <a:xfrm>
+            <a:off x="3378098" y="1600200"/>
+            <a:ext cx="2606040" cy="3749040"/>
+          </a:xfrm>
+          <a:prstGeom prst="roundRect">
+            <a:avLst>
+              <a:gd name="adj" fmla="val 5614"/>
             </a:avLst>
           </a:prstGeom>
           <a:solidFill>
@@ -8957,16 +8891,40 @@
           </a:effectLst>
         </p:spPr>
       </p:sp>
-      <p:sp>
-        <p:nvSpPr>
-          <p:cNvPr id="8" name="Text 5"/>
-          <p:cNvSpPr txBox="1"/>
-          <p:nvPr/>
-        </p:nvSpPr>
-        <p:spPr>
-          <a:xfrm>
-            <a:off x="7223760" y="1878178"/>
-            <a:ext cx="1981048" cy="566928"/>
+      <p:pic>
+        <p:nvPicPr>
+          <p:cNvPr id="16" name="Image 1" descr="/home/user/-/presentation/candidates/assets/orb_2.png">    </p:cNvPr>
+          <p:cNvPicPr>
+            <a:picLocks noChangeAspect="1"/>
+          </p:cNvPicPr>
+          <p:nvPr/>
+        </p:nvPicPr>
+        <p:blipFill>
+          <a:blip r:embed="rId2"/>
+          <a:stretch>
+            <a:fillRect/>
+          </a:stretch>
+        </p:blipFill>
+        <p:spPr>
+          <a:xfrm>
+            <a:off x="3634130" y="1856232"/>
+            <a:ext cx="566928" cy="566928"/>
+          </a:xfrm>
+          <a:prstGeom prst="rect">
+            <a:avLst/>
+          </a:prstGeom>
+        </p:spPr>
+      </p:pic>
+      <p:sp>
+        <p:nvSpPr>
+          <p:cNvPr id="17" name="Text 13"/>
+          <p:cNvSpPr txBox="1"/>
+          <p:nvPr/>
+        </p:nvSpPr>
+        <p:spPr>
+          <a:xfrm>
+            <a:off x="3634130" y="1856232"/>
+            <a:ext cx="566928" cy="566928"/>
           </a:xfrm>
           <a:prstGeom prst="rect">
             <a:avLst/>
@@ -8980,35 +8938,119 @@
           <a:p>
             <a:pPr algn="ctr" indent="0" marL="0">
               <a:lnSpc>
-                <a:spcPts val="2800"/>
-              </a:lnSpc>
-              <a:buNone/>
-            </a:pPr>
-            <a:r>
-              <a:rPr lang="en-US" sz="2800" b="1" dirty="0">
-                <a:solidFill>
-                  <a:srgbClr val="0B3A9E"/>
-                </a:solidFill>
-                <a:latin typeface="Meiryo UI" pitchFamily="34" charset="0"/>
-                <a:ea typeface="Meiryo UI" pitchFamily="34" charset="-122"/>
-                <a:cs typeface="Meiryo UI" pitchFamily="34" charset="-120"/>
-              </a:rPr>
-              <a:t>18人</a:t>
-            </a:r>
-            <a:endParaRPr lang="en-US" sz="2800" dirty="0"/>
-          </a:p>
-        </p:txBody>
-      </p:sp>
-      <p:sp>
-        <p:nvSpPr>
-          <p:cNvPr id="9" name="Text 6"/>
-          <p:cNvSpPr txBox="1"/>
-          <p:nvPr/>
-        </p:nvSpPr>
-        <p:spPr>
-          <a:xfrm>
-            <a:off x="7269480" y="2536546"/>
-            <a:ext cx="1889608" cy="727862"/>
+                <a:spcPts val="1900"/>
+              </a:lnSpc>
+              <a:buNone/>
+            </a:pPr>
+            <a:r>
+              <a:rPr lang="en-US" sz="1900" b="1" dirty="0">
+                <a:solidFill>
+                  <a:srgbClr val="FFFFFF"/>
+                </a:solidFill>
+                <a:latin typeface="Meiryo UI" pitchFamily="34" charset="0"/>
+                <a:ea typeface="Meiryo UI" pitchFamily="34" charset="-122"/>
+                <a:cs typeface="Meiryo UI" pitchFamily="34" charset="-120"/>
+              </a:rPr>
+              <a:t>2</a:t>
+            </a:r>
+            <a:endParaRPr lang="en-US" sz="1900" dirty="0"/>
+          </a:p>
+        </p:txBody>
+      </p:sp>
+      <p:sp>
+        <p:nvSpPr>
+          <p:cNvPr id="18" name="Text 14"/>
+          <p:cNvSpPr txBox="1"/>
+          <p:nvPr/>
+        </p:nvSpPr>
+        <p:spPr>
+          <a:xfrm>
+            <a:off x="4338218" y="1819656"/>
+            <a:ext cx="1554480" cy="384048"/>
+          </a:xfrm>
+          <a:prstGeom prst="rect">
+            <a:avLst/>
+          </a:prstGeom>
+          <a:noFill/>
+          <a:ln/>
+        </p:spPr>
+        <p:txBody>
+          <a:bodyPr wrap="square" lIns="0" tIns="0" rIns="0" bIns="0" rtlCol="0" anchor="ctr"/>
+          <a:lstStyle/>
+          <a:p>
+            <a:pPr indent="0" marL="0">
+              <a:lnSpc>
+                <a:spcPts val="2200"/>
+              </a:lnSpc>
+              <a:buNone/>
+            </a:pPr>
+            <a:r>
+              <a:rPr lang="en-US" sz="2000" b="1" dirty="0">
+                <a:solidFill>
+                  <a:srgbClr val="2E3440"/>
+                </a:solidFill>
+                <a:latin typeface="Meiryo UI" pitchFamily="34" charset="0"/>
+                <a:ea typeface="Meiryo UI" pitchFamily="34" charset="-122"/>
+                <a:cs typeface="Meiryo UI" pitchFamily="34" charset="-120"/>
+              </a:rPr>
+              <a:t>〜6か月</a:t>
+            </a:r>
+            <a:endParaRPr lang="en-US" sz="2000" dirty="0"/>
+          </a:p>
+        </p:txBody>
+      </p:sp>
+      <p:sp>
+        <p:nvSpPr>
+          <p:cNvPr id="19" name="Text 15"/>
+          <p:cNvSpPr txBox="1"/>
+          <p:nvPr/>
+        </p:nvSpPr>
+        <p:spPr>
+          <a:xfrm>
+            <a:off x="4338218" y="2185416"/>
+            <a:ext cx="1554480" cy="274320"/>
+          </a:xfrm>
+          <a:prstGeom prst="rect">
+            <a:avLst/>
+          </a:prstGeom>
+          <a:noFill/>
+          <a:ln/>
+        </p:spPr>
+        <p:txBody>
+          <a:bodyPr wrap="square" lIns="0" tIns="0" rIns="0" bIns="0" rtlCol="0" anchor="ctr"/>
+          <a:lstStyle/>
+          <a:p>
+            <a:pPr indent="0" marL="0">
+              <a:lnSpc>
+                <a:spcPts val="1430"/>
+              </a:lnSpc>
+              <a:buNone/>
+            </a:pPr>
+            <a:r>
+              <a:rPr lang="en-US" sz="1300" b="1" dirty="0">
+                <a:solidFill>
+                  <a:srgbClr val="176AA6"/>
+                </a:solidFill>
+                <a:latin typeface="Meiryo UI" pitchFamily="34" charset="0"/>
+                <a:ea typeface="Meiryo UI" pitchFamily="34" charset="-122"/>
+                <a:cs typeface="Meiryo UI" pitchFamily="34" charset="-120"/>
+              </a:rPr>
+              <a:t>形にする</a:t>
+            </a:r>
+            <a:endParaRPr lang="en-US" sz="1300" dirty="0"/>
+          </a:p>
+        </p:txBody>
+      </p:sp>
+      <p:sp>
+        <p:nvSpPr>
+          <p:cNvPr id="20" name="Text 16"/>
+          <p:cNvSpPr txBox="1"/>
+          <p:nvPr/>
+        </p:nvSpPr>
+        <p:spPr>
+          <a:xfrm>
+            <a:off x="3634130" y="2651760"/>
+            <a:ext cx="2240280" cy="1600200"/>
           </a:xfrm>
           <a:prstGeom prst="rect">
             <a:avLst/>
@@ -9020,61 +9062,257 @@
           <a:bodyPr wrap="square" lIns="0" tIns="0" rIns="0" bIns="0" rtlCol="0" anchor="t"/>
           <a:lstStyle/>
           <a:p>
-            <a:pPr algn="ctr" indent="0" marL="0">
-              <a:lnSpc>
-                <a:spcPts val="1560"/>
-              </a:lnSpc>
-              <a:buNone/>
-            </a:pPr>
-            <a:r>
-              <a:rPr lang="en-US" sz="1200" dirty="0">
-                <a:solidFill>
-                  <a:srgbClr val="5B6472"/>
-                </a:solidFill>
-                <a:latin typeface="Meiryo UI" pitchFamily="34" charset="0"/>
-                <a:ea typeface="Meiryo UI" pitchFamily="34" charset="-122"/>
-                <a:cs typeface="Meiryo UI" pitchFamily="34" charset="-120"/>
-              </a:rPr>
-              <a:t>1日の平均利用者数</a:t>
-            </a:r>
-            <a:endParaRPr lang="en-US" sz="1200" dirty="0"/>
-          </a:p>
-          <a:p>
-            <a:pPr algn="ctr" indent="0" marL="0">
-              <a:lnSpc>
-                <a:spcPts val="1560"/>
-              </a:lnSpc>
-              <a:buNone/>
-            </a:pPr>
-            <a:r>
-              <a:rPr lang="en-US" sz="1200" dirty="0">
-                <a:solidFill>
-                  <a:srgbClr val="5B6472"/>
-                </a:solidFill>
-                <a:latin typeface="Meiryo UI" pitchFamily="34" charset="0"/>
-                <a:ea typeface="Meiryo UI" pitchFamily="34" charset="-122"/>
-                <a:cs typeface="Meiryo UI" pitchFamily="34" charset="-120"/>
-              </a:rPr>
-              <a:t>（安定期）</a:t>
-            </a:r>
-            <a:endParaRPr lang="en-US" sz="1200" dirty="0"/>
-          </a:p>
-        </p:txBody>
-      </p:sp>
-      <p:sp>
-        <p:nvSpPr>
-          <p:cNvPr id="10" name="Shape 7"/>
+            <a:pPr indent="0" marL="0">
+              <a:lnSpc>
+                <a:spcPts val="1780"/>
+              </a:lnSpc>
+              <a:buNone/>
+            </a:pPr>
+            <a:r>
+              <a:rPr lang="en-US" sz="1250" dirty="0">
+                <a:solidFill>
+                  <a:srgbClr val="2E3440"/>
+                </a:solidFill>
+                <a:latin typeface="Meiryo UI" pitchFamily="34" charset="0"/>
+                <a:ea typeface="Meiryo UI" pitchFamily="34" charset="-122"/>
+                <a:cs typeface="Meiryo UI" pitchFamily="34" charset="-120"/>
+              </a:rPr>
+              <a:t>・B型の事業計画書を</a:t>
+            </a:r>
+            <a:endParaRPr lang="en-US" sz="1250" dirty="0"/>
+          </a:p>
+          <a:p>
+            <a:pPr indent="0" marL="0">
+              <a:lnSpc>
+                <a:spcPts val="1780"/>
+              </a:lnSpc>
+              <a:buNone/>
+            </a:pPr>
+            <a:r>
+              <a:rPr lang="en-US" sz="1250" dirty="0">
+                <a:solidFill>
+                  <a:srgbClr val="2E3440"/>
+                </a:solidFill>
+                <a:latin typeface="Meiryo UI" pitchFamily="34" charset="0"/>
+                <a:ea typeface="Meiryo UI" pitchFamily="34" charset="-122"/>
+                <a:cs typeface="Meiryo UI" pitchFamily="34" charset="-120"/>
+              </a:rPr>
+              <a:t>　社内の形式で作成</a:t>
+            </a:r>
+            <a:endParaRPr lang="en-US" sz="1250" dirty="0"/>
+          </a:p>
+          <a:p>
+            <a:pPr indent="0" marL="0">
+              <a:lnSpc>
+                <a:spcPts val="1780"/>
+              </a:lnSpc>
+              <a:buNone/>
+            </a:pPr>
+            <a:r>
+              <a:rPr lang="en-US" sz="1250" dirty="0">
+                <a:solidFill>
+                  <a:srgbClr val="2E3440"/>
+                </a:solidFill>
+                <a:latin typeface="Meiryo UI" pitchFamily="34" charset="0"/>
+                <a:ea typeface="Meiryo UI" pitchFamily="34" charset="-122"/>
+                <a:cs typeface="Meiryo UI" pitchFamily="34" charset="-120"/>
+              </a:rPr>
+              <a:t>・受託先・連携先の開拓</a:t>
+            </a:r>
+            <a:endParaRPr lang="en-US" sz="1250" dirty="0"/>
+          </a:p>
+          <a:p>
+            <a:pPr indent="0" marL="0">
+              <a:lnSpc>
+                <a:spcPts val="1780"/>
+              </a:lnSpc>
+              <a:buNone/>
+            </a:pPr>
+            <a:r>
+              <a:rPr lang="en-US" sz="1250" dirty="0">
+                <a:solidFill>
+                  <a:srgbClr val="2E3440"/>
+                </a:solidFill>
+                <a:latin typeface="Meiryo UI" pitchFamily="34" charset="0"/>
+                <a:ea typeface="Meiryo UI" pitchFamily="34" charset="-122"/>
+                <a:cs typeface="Meiryo UI" pitchFamily="34" charset="-120"/>
+              </a:rPr>
+              <a:t>・特別支援学校と連携</a:t>
+            </a:r>
+            <a:endParaRPr lang="en-US" sz="1250" dirty="0"/>
+          </a:p>
+        </p:txBody>
+      </p:sp>
+      <p:sp>
+        <p:nvSpPr>
+          <p:cNvPr id="21" name="Shape 17"/>
           <p:cNvSpPr/>
           <p:nvPr/>
         </p:nvSpPr>
         <p:spPr>
           <a:xfrm>
-            <a:off x="9479128" y="1600200"/>
-            <a:ext cx="2163928" cy="1737360"/>
+            <a:off x="3634130" y="4343400"/>
+            <a:ext cx="868680" cy="292608"/>
           </a:xfrm>
           <a:prstGeom prst="roundRect">
             <a:avLst>
-              <a:gd name="adj" fmla="val 8421"/>
+              <a:gd name="adj" fmla="val 50000"/>
+            </a:avLst>
+          </a:prstGeom>
+          <a:solidFill>
+            <a:srgbClr val="176AA6"/>
+          </a:solidFill>
+          <a:ln w="6350">
+            <a:solidFill>
+              <a:srgbClr val="176AA6"/>
+            </a:solidFill>
+            <a:prstDash val="solid"/>
+          </a:ln>
+        </p:spPr>
+      </p:sp>
+      <p:sp>
+        <p:nvSpPr>
+          <p:cNvPr id="22" name="Text 18"/>
+          <p:cNvSpPr txBox="1"/>
+          <p:nvPr/>
+        </p:nvSpPr>
+        <p:spPr>
+          <a:xfrm>
+            <a:off x="3634130" y="4343400"/>
+            <a:ext cx="868680" cy="292608"/>
+          </a:xfrm>
+          <a:prstGeom prst="rect">
+            <a:avLst/>
+          </a:prstGeom>
+          <a:noFill/>
+          <a:ln/>
+        </p:spPr>
+        <p:txBody>
+          <a:bodyPr wrap="square" lIns="0" tIns="0" rIns="0" bIns="0" rtlCol="0" anchor="ctr"/>
+          <a:lstStyle/>
+          <a:p>
+            <a:pPr algn="ctr" indent="0" marL="0">
+              <a:lnSpc>
+                <a:spcPts val="1300"/>
+              </a:lnSpc>
+              <a:buNone/>
+            </a:pPr>
+            <a:r>
+              <a:rPr lang="en-US" sz="1300" b="1" dirty="0">
+                <a:solidFill>
+                  <a:srgbClr val="FFFFFF"/>
+                </a:solidFill>
+                <a:latin typeface="Meiryo UI" pitchFamily="34" charset="0"/>
+                <a:ea typeface="Meiryo UI" pitchFamily="34" charset="-122"/>
+                <a:cs typeface="Meiryo UI" pitchFamily="34" charset="-120"/>
+              </a:rPr>
+              <a:t>成果物</a:t>
+            </a:r>
+            <a:endParaRPr lang="en-US" sz="1300" dirty="0"/>
+          </a:p>
+        </p:txBody>
+      </p:sp>
+      <p:sp>
+        <p:nvSpPr>
+          <p:cNvPr id="23" name="Text 19"/>
+          <p:cNvSpPr txBox="1"/>
+          <p:nvPr/>
+        </p:nvSpPr>
+        <p:spPr>
+          <a:xfrm>
+            <a:off x="3634130" y="4709160"/>
+            <a:ext cx="2240280" cy="548640"/>
+          </a:xfrm>
+          <a:prstGeom prst="rect">
+            <a:avLst/>
+          </a:prstGeom>
+          <a:noFill/>
+          <a:ln/>
+        </p:spPr>
+        <p:txBody>
+          <a:bodyPr wrap="square" lIns="0" tIns="0" rIns="0" bIns="0" rtlCol="0" anchor="t"/>
+          <a:lstStyle/>
+          <a:p>
+            <a:pPr indent="0" marL="0">
+              <a:lnSpc>
+                <a:spcPts val="1620"/>
+              </a:lnSpc>
+              <a:buNone/>
+            </a:pPr>
+            <a:r>
+              <a:rPr lang="en-US" sz="1200" dirty="0">
+                <a:solidFill>
+                  <a:srgbClr val="5B6472"/>
+                </a:solidFill>
+                <a:latin typeface="Meiryo UI" pitchFamily="34" charset="0"/>
+                <a:ea typeface="Meiryo UI" pitchFamily="34" charset="-122"/>
+                <a:cs typeface="Meiryo UI" pitchFamily="34" charset="-120"/>
+              </a:rPr>
+              <a:t>事業計画書（案）</a:t>
+            </a:r>
+            <a:endParaRPr lang="en-US" sz="1200" dirty="0"/>
+          </a:p>
+          <a:p>
+            <a:pPr indent="0" marL="0">
+              <a:lnSpc>
+                <a:spcPts val="1620"/>
+              </a:lnSpc>
+              <a:buNone/>
+            </a:pPr>
+            <a:r>
+              <a:rPr lang="en-US" sz="1200" dirty="0">
+                <a:solidFill>
+                  <a:srgbClr val="5B6472"/>
+                </a:solidFill>
+                <a:latin typeface="Meiryo UI" pitchFamily="34" charset="0"/>
+                <a:ea typeface="Meiryo UI" pitchFamily="34" charset="-122"/>
+                <a:cs typeface="Meiryo UI" pitchFamily="34" charset="-120"/>
+              </a:rPr>
+              <a:t>連携先リスト</a:t>
+            </a:r>
+            <a:endParaRPr lang="en-US" sz="1200" dirty="0"/>
+          </a:p>
+        </p:txBody>
+      </p:sp>
+      <p:sp>
+        <p:nvSpPr>
+          <p:cNvPr id="24" name="Shape 20"/>
+          <p:cNvSpPr/>
+          <p:nvPr/>
+        </p:nvSpPr>
+        <p:spPr>
+          <a:xfrm>
+            <a:off x="6036412" y="3337560"/>
+            <a:ext cx="118872" cy="274320"/>
+          </a:xfrm>
+          <a:prstGeom prst="chevron">
+            <a:avLst/>
+          </a:prstGeom>
+          <a:solidFill>
+            <a:srgbClr val="B9CCF2"/>
+          </a:solidFill>
+          <a:ln w="6350">
+            <a:solidFill>
+              <a:srgbClr val="B9CCF2"/>
+            </a:solidFill>
+            <a:prstDash val="solid"/>
+          </a:ln>
+        </p:spPr>
+      </p:sp>
+      <p:sp>
+        <p:nvSpPr>
+          <p:cNvPr id="25" name="Shape 21"/>
+          <p:cNvSpPr/>
+          <p:nvPr/>
+        </p:nvSpPr>
+        <p:spPr>
+          <a:xfrm>
+            <a:off x="6207557" y="1600200"/>
+            <a:ext cx="2606040" cy="3749040"/>
+          </a:xfrm>
+          <a:prstGeom prst="roundRect">
+            <a:avLst>
+              <a:gd name="adj" fmla="val 5614"/>
             </a:avLst>
           </a:prstGeom>
           <a:solidFill>
@@ -9095,16 +9333,40 @@
           </a:effectLst>
         </p:spPr>
       </p:sp>
-      <p:sp>
-        <p:nvSpPr>
-          <p:cNvPr id="11" name="Text 8"/>
-          <p:cNvSpPr txBox="1"/>
-          <p:nvPr/>
-        </p:nvSpPr>
-        <p:spPr>
-          <a:xfrm>
-            <a:off x="9570568" y="1878178"/>
-            <a:ext cx="1981048" cy="566928"/>
+      <p:pic>
+        <p:nvPicPr>
+          <p:cNvPr id="26" name="Image 2" descr="/home/user/-/presentation/candidates/assets/orb_4.png">    </p:cNvPr>
+          <p:cNvPicPr>
+            <a:picLocks noChangeAspect="1"/>
+          </p:cNvPicPr>
+          <p:nvPr/>
+        </p:nvPicPr>
+        <p:blipFill>
+          <a:blip r:embed="rId3"/>
+          <a:stretch>
+            <a:fillRect/>
+          </a:stretch>
+        </p:blipFill>
+        <p:spPr>
+          <a:xfrm>
+            <a:off x="6463589" y="1856232"/>
+            <a:ext cx="566928" cy="566928"/>
+          </a:xfrm>
+          <a:prstGeom prst="rect">
+            <a:avLst/>
+          </a:prstGeom>
+        </p:spPr>
+      </p:pic>
+      <p:sp>
+        <p:nvSpPr>
+          <p:cNvPr id="27" name="Text 22"/>
+          <p:cNvSpPr txBox="1"/>
+          <p:nvPr/>
+        </p:nvSpPr>
+        <p:spPr>
+          <a:xfrm>
+            <a:off x="6463589" y="1856232"/>
+            <a:ext cx="566928" cy="566928"/>
           </a:xfrm>
           <a:prstGeom prst="rect">
             <a:avLst/>
@@ -9118,35 +9380,119 @@
           <a:p>
             <a:pPr algn="ctr" indent="0" marL="0">
               <a:lnSpc>
-                <a:spcPts val="2800"/>
-              </a:lnSpc>
-              <a:buNone/>
-            </a:pPr>
-            <a:r>
-              <a:rPr lang="en-US" sz="2800" b="1" dirty="0">
-                <a:solidFill>
-                  <a:srgbClr val="1F5FD6"/>
-                </a:solidFill>
-                <a:latin typeface="Meiryo UI" pitchFamily="34" charset="0"/>
-                <a:ea typeface="Meiryo UI" pitchFamily="34" charset="-122"/>
-                <a:cs typeface="Meiryo UI" pitchFamily="34" charset="-120"/>
-              </a:rPr>
-              <a:t>6か月目</a:t>
-            </a:r>
-            <a:endParaRPr lang="en-US" sz="2800" dirty="0"/>
-          </a:p>
-        </p:txBody>
-      </p:sp>
-      <p:sp>
-        <p:nvSpPr>
-          <p:cNvPr id="12" name="Text 9"/>
-          <p:cNvSpPr txBox="1"/>
-          <p:nvPr/>
-        </p:nvSpPr>
-        <p:spPr>
-          <a:xfrm>
-            <a:off x="9616288" y="2536546"/>
-            <a:ext cx="1889608" cy="727862"/>
+                <a:spcPts val="1900"/>
+              </a:lnSpc>
+              <a:buNone/>
+            </a:pPr>
+            <a:r>
+              <a:rPr lang="en-US" sz="1900" b="1" dirty="0">
+                <a:solidFill>
+                  <a:srgbClr val="FFFFFF"/>
+                </a:solidFill>
+                <a:latin typeface="Meiryo UI" pitchFamily="34" charset="0"/>
+                <a:ea typeface="Meiryo UI" pitchFamily="34" charset="-122"/>
+                <a:cs typeface="Meiryo UI" pitchFamily="34" charset="-120"/>
+              </a:rPr>
+              <a:t>3</a:t>
+            </a:r>
+            <a:endParaRPr lang="en-US" sz="1900" dirty="0"/>
+          </a:p>
+        </p:txBody>
+      </p:sp>
+      <p:sp>
+        <p:nvSpPr>
+          <p:cNvPr id="28" name="Text 23"/>
+          <p:cNvSpPr txBox="1"/>
+          <p:nvPr/>
+        </p:nvSpPr>
+        <p:spPr>
+          <a:xfrm>
+            <a:off x="7167677" y="1819656"/>
+            <a:ext cx="1554480" cy="384048"/>
+          </a:xfrm>
+          <a:prstGeom prst="rect">
+            <a:avLst/>
+          </a:prstGeom>
+          <a:noFill/>
+          <a:ln/>
+        </p:spPr>
+        <p:txBody>
+          <a:bodyPr wrap="square" lIns="0" tIns="0" rIns="0" bIns="0" rtlCol="0" anchor="ctr"/>
+          <a:lstStyle/>
+          <a:p>
+            <a:pPr indent="0" marL="0">
+              <a:lnSpc>
+                <a:spcPts val="2200"/>
+              </a:lnSpc>
+              <a:buNone/>
+            </a:pPr>
+            <a:r>
+              <a:rPr lang="en-US" sz="2000" b="1" dirty="0">
+                <a:solidFill>
+                  <a:srgbClr val="2E3440"/>
+                </a:solidFill>
+                <a:latin typeface="Meiryo UI" pitchFamily="34" charset="0"/>
+                <a:ea typeface="Meiryo UI" pitchFamily="34" charset="-122"/>
+                <a:cs typeface="Meiryo UI" pitchFamily="34" charset="-120"/>
+              </a:rPr>
+              <a:t>〜1年</a:t>
+            </a:r>
+            <a:endParaRPr lang="en-US" sz="2000" dirty="0"/>
+          </a:p>
+        </p:txBody>
+      </p:sp>
+      <p:sp>
+        <p:nvSpPr>
+          <p:cNvPr id="29" name="Text 24"/>
+          <p:cNvSpPr txBox="1"/>
+          <p:nvPr/>
+        </p:nvSpPr>
+        <p:spPr>
+          <a:xfrm>
+            <a:off x="7167677" y="2185416"/>
+            <a:ext cx="1554480" cy="274320"/>
+          </a:xfrm>
+          <a:prstGeom prst="rect">
+            <a:avLst/>
+          </a:prstGeom>
+          <a:noFill/>
+          <a:ln/>
+        </p:spPr>
+        <p:txBody>
+          <a:bodyPr wrap="square" lIns="0" tIns="0" rIns="0" bIns="0" rtlCol="0" anchor="ctr"/>
+          <a:lstStyle/>
+          <a:p>
+            <a:pPr indent="0" marL="0">
+              <a:lnSpc>
+                <a:spcPts val="1430"/>
+              </a:lnSpc>
+              <a:buNone/>
+            </a:pPr>
+            <a:r>
+              <a:rPr lang="en-US" sz="1300" b="1" dirty="0">
+                <a:solidFill>
+                  <a:srgbClr val="4B3BC9"/>
+                </a:solidFill>
+                <a:latin typeface="Meiryo UI" pitchFamily="34" charset="0"/>
+                <a:ea typeface="Meiryo UI" pitchFamily="34" charset="-122"/>
+                <a:cs typeface="Meiryo UI" pitchFamily="34" charset="-120"/>
+              </a:rPr>
+              <a:t>提案する</a:t>
+            </a:r>
+            <a:endParaRPr lang="en-US" sz="1300" dirty="0"/>
+          </a:p>
+        </p:txBody>
+      </p:sp>
+      <p:sp>
+        <p:nvSpPr>
+          <p:cNvPr id="30" name="Text 25"/>
+          <p:cNvSpPr txBox="1"/>
+          <p:nvPr/>
+        </p:nvSpPr>
+        <p:spPr>
+          <a:xfrm>
+            <a:off x="6463589" y="2651760"/>
+            <a:ext cx="2240280" cy="1600200"/>
           </a:xfrm>
           <a:prstGeom prst="rect">
             <a:avLst/>
@@ -9158,41 +9504,257 @@
           <a:bodyPr wrap="square" lIns="0" tIns="0" rIns="0" bIns="0" rtlCol="0" anchor="t"/>
           <a:lstStyle/>
           <a:p>
-            <a:pPr algn="ctr" indent="0" marL="0">
-              <a:lnSpc>
-                <a:spcPts val="1560"/>
-              </a:lnSpc>
-              <a:buNone/>
-            </a:pPr>
-            <a:r>
-              <a:rPr lang="en-US" sz="1200" dirty="0">
-                <a:solidFill>
-                  <a:srgbClr val="5B6472"/>
-                </a:solidFill>
-                <a:latin typeface="Meiryo UI" pitchFamily="34" charset="0"/>
-                <a:ea typeface="Meiryo UI" pitchFamily="34" charset="-122"/>
-                <a:cs typeface="Meiryo UI" pitchFamily="34" charset="-120"/>
-              </a:rPr>
-              <a:t>単月で黒字化</a:t>
-            </a:r>
-            <a:endParaRPr lang="en-US" sz="1200" dirty="0"/>
-          </a:p>
-        </p:txBody>
-      </p:sp>
-      <p:sp>
-        <p:nvSpPr>
-          <p:cNvPr id="13" name="Shape 10"/>
+            <a:pPr indent="0" marL="0">
+              <a:lnSpc>
+                <a:spcPts val="1780"/>
+              </a:lnSpc>
+              <a:buNone/>
+            </a:pPr>
+            <a:r>
+              <a:rPr lang="en-US" sz="1250" dirty="0">
+                <a:solidFill>
+                  <a:srgbClr val="2E3440"/>
+                </a:solidFill>
+                <a:latin typeface="Meiryo UI" pitchFamily="34" charset="0"/>
+                <a:ea typeface="Meiryo UI" pitchFamily="34" charset="-122"/>
+                <a:cs typeface="Meiryo UI" pitchFamily="34" charset="-120"/>
+              </a:rPr>
+              <a:t>・役員へ事業計画を提案</a:t>
+            </a:r>
+            <a:endParaRPr lang="en-US" sz="1250" dirty="0"/>
+          </a:p>
+          <a:p>
+            <a:pPr indent="0" marL="0">
+              <a:lnSpc>
+                <a:spcPts val="1780"/>
+              </a:lnSpc>
+              <a:buNone/>
+            </a:pPr>
+            <a:r>
+              <a:rPr lang="en-US" sz="1250" dirty="0">
+                <a:solidFill>
+                  <a:srgbClr val="2E3440"/>
+                </a:solidFill>
+                <a:latin typeface="Meiryo UI" pitchFamily="34" charset="0"/>
+                <a:ea typeface="Meiryo UI" pitchFamily="34" charset="-122"/>
+                <a:cs typeface="Meiryo UI" pitchFamily="34" charset="-120"/>
+              </a:rPr>
+              <a:t>・承認後、物件・採用・</a:t>
+            </a:r>
+            <a:endParaRPr lang="en-US" sz="1250" dirty="0"/>
+          </a:p>
+          <a:p>
+            <a:pPr indent="0" marL="0">
+              <a:lnSpc>
+                <a:spcPts val="1780"/>
+              </a:lnSpc>
+              <a:buNone/>
+            </a:pPr>
+            <a:r>
+              <a:rPr lang="en-US" sz="1250" dirty="0">
+                <a:solidFill>
+                  <a:srgbClr val="2E3440"/>
+                </a:solidFill>
+                <a:latin typeface="Meiryo UI" pitchFamily="34" charset="0"/>
+                <a:ea typeface="Meiryo UI" pitchFamily="34" charset="-122"/>
+                <a:cs typeface="Meiryo UI" pitchFamily="34" charset="-120"/>
+              </a:rPr>
+              <a:t>　指定申請へ</a:t>
+            </a:r>
+            <a:endParaRPr lang="en-US" sz="1250" dirty="0"/>
+          </a:p>
+          <a:p>
+            <a:pPr indent="0" marL="0">
+              <a:lnSpc>
+                <a:spcPts val="1780"/>
+              </a:lnSpc>
+              <a:buNone/>
+            </a:pPr>
+            <a:r>
+              <a:rPr lang="en-US" sz="1250" dirty="0">
+                <a:solidFill>
+                  <a:srgbClr val="2E3440"/>
+                </a:solidFill>
+                <a:latin typeface="Meiryo UI" pitchFamily="34" charset="0"/>
+                <a:ea typeface="Meiryo UI" pitchFamily="34" charset="-122"/>
+                <a:cs typeface="Meiryo UI" pitchFamily="34" charset="-120"/>
+              </a:rPr>
+              <a:t>・保護者説明会の開催</a:t>
+            </a:r>
+            <a:endParaRPr lang="en-US" sz="1250" dirty="0"/>
+          </a:p>
+        </p:txBody>
+      </p:sp>
+      <p:sp>
+        <p:nvSpPr>
+          <p:cNvPr id="31" name="Shape 26"/>
           <p:cNvSpPr/>
           <p:nvPr/>
         </p:nvSpPr>
         <p:spPr>
           <a:xfrm>
-            <a:off x="7132320" y="3520440"/>
-            <a:ext cx="2163928" cy="1737360"/>
+            <a:off x="6463589" y="4343400"/>
+            <a:ext cx="868680" cy="292608"/>
           </a:xfrm>
           <a:prstGeom prst="roundRect">
             <a:avLst>
-              <a:gd name="adj" fmla="val 8421"/>
+              <a:gd name="adj" fmla="val 50000"/>
+            </a:avLst>
+          </a:prstGeom>
+          <a:solidFill>
+            <a:srgbClr val="4B3BC9"/>
+          </a:solidFill>
+          <a:ln w="6350">
+            <a:solidFill>
+              <a:srgbClr val="4B3BC9"/>
+            </a:solidFill>
+            <a:prstDash val="solid"/>
+          </a:ln>
+        </p:spPr>
+      </p:sp>
+      <p:sp>
+        <p:nvSpPr>
+          <p:cNvPr id="32" name="Text 27"/>
+          <p:cNvSpPr txBox="1"/>
+          <p:nvPr/>
+        </p:nvSpPr>
+        <p:spPr>
+          <a:xfrm>
+            <a:off x="6463589" y="4343400"/>
+            <a:ext cx="868680" cy="292608"/>
+          </a:xfrm>
+          <a:prstGeom prst="rect">
+            <a:avLst/>
+          </a:prstGeom>
+          <a:noFill/>
+          <a:ln/>
+        </p:spPr>
+        <p:txBody>
+          <a:bodyPr wrap="square" lIns="0" tIns="0" rIns="0" bIns="0" rtlCol="0" anchor="ctr"/>
+          <a:lstStyle/>
+          <a:p>
+            <a:pPr algn="ctr" indent="0" marL="0">
+              <a:lnSpc>
+                <a:spcPts val="1300"/>
+              </a:lnSpc>
+              <a:buNone/>
+            </a:pPr>
+            <a:r>
+              <a:rPr lang="en-US" sz="1300" b="1" dirty="0">
+                <a:solidFill>
+                  <a:srgbClr val="FFFFFF"/>
+                </a:solidFill>
+                <a:latin typeface="Meiryo UI" pitchFamily="34" charset="0"/>
+                <a:ea typeface="Meiryo UI" pitchFamily="34" charset="-122"/>
+                <a:cs typeface="Meiryo UI" pitchFamily="34" charset="-120"/>
+              </a:rPr>
+              <a:t>成果物</a:t>
+            </a:r>
+            <a:endParaRPr lang="en-US" sz="1300" dirty="0"/>
+          </a:p>
+        </p:txBody>
+      </p:sp>
+      <p:sp>
+        <p:nvSpPr>
+          <p:cNvPr id="33" name="Text 28"/>
+          <p:cNvSpPr txBox="1"/>
+          <p:nvPr/>
+        </p:nvSpPr>
+        <p:spPr>
+          <a:xfrm>
+            <a:off x="6463589" y="4709160"/>
+            <a:ext cx="2240280" cy="548640"/>
+          </a:xfrm>
+          <a:prstGeom prst="rect">
+            <a:avLst/>
+          </a:prstGeom>
+          <a:noFill/>
+          <a:ln/>
+        </p:spPr>
+        <p:txBody>
+          <a:bodyPr wrap="square" lIns="0" tIns="0" rIns="0" bIns="0" rtlCol="0" anchor="t"/>
+          <a:lstStyle/>
+          <a:p>
+            <a:pPr indent="0" marL="0">
+              <a:lnSpc>
+                <a:spcPts val="1620"/>
+              </a:lnSpc>
+              <a:buNone/>
+            </a:pPr>
+            <a:r>
+              <a:rPr lang="en-US" sz="1200" dirty="0">
+                <a:solidFill>
+                  <a:srgbClr val="5B6472"/>
+                </a:solidFill>
+                <a:latin typeface="Meiryo UI" pitchFamily="34" charset="0"/>
+                <a:ea typeface="Meiryo UI" pitchFamily="34" charset="-122"/>
+                <a:cs typeface="Meiryo UI" pitchFamily="34" charset="-120"/>
+              </a:rPr>
+              <a:t>提案資料</a:t>
+            </a:r>
+            <a:endParaRPr lang="en-US" sz="1200" dirty="0"/>
+          </a:p>
+          <a:p>
+            <a:pPr indent="0" marL="0">
+              <a:lnSpc>
+                <a:spcPts val="1620"/>
+              </a:lnSpc>
+              <a:buNone/>
+            </a:pPr>
+            <a:r>
+              <a:rPr lang="en-US" sz="1200" dirty="0">
+                <a:solidFill>
+                  <a:srgbClr val="5B6472"/>
+                </a:solidFill>
+                <a:latin typeface="Meiryo UI" pitchFamily="34" charset="0"/>
+                <a:ea typeface="Meiryo UI" pitchFamily="34" charset="-122"/>
+                <a:cs typeface="Meiryo UI" pitchFamily="34" charset="-120"/>
+              </a:rPr>
+              <a:t>開設スケジュール</a:t>
+            </a:r>
+            <a:endParaRPr lang="en-US" sz="1200" dirty="0"/>
+          </a:p>
+        </p:txBody>
+      </p:sp>
+      <p:sp>
+        <p:nvSpPr>
+          <p:cNvPr id="34" name="Shape 29"/>
+          <p:cNvSpPr/>
+          <p:nvPr/>
+        </p:nvSpPr>
+        <p:spPr>
+          <a:xfrm>
+            <a:off x="8865870" y="3337560"/>
+            <a:ext cx="118872" cy="274320"/>
+          </a:xfrm>
+          <a:prstGeom prst="chevron">
+            <a:avLst/>
+          </a:prstGeom>
+          <a:solidFill>
+            <a:srgbClr val="B9CCF2"/>
+          </a:solidFill>
+          <a:ln w="6350">
+            <a:solidFill>
+              <a:srgbClr val="B9CCF2"/>
+            </a:solidFill>
+            <a:prstDash val="solid"/>
+          </a:ln>
+        </p:spPr>
+      </p:sp>
+      <p:sp>
+        <p:nvSpPr>
+          <p:cNvPr id="35" name="Shape 30"/>
+          <p:cNvSpPr/>
+          <p:nvPr/>
+        </p:nvSpPr>
+        <p:spPr>
+          <a:xfrm>
+            <a:off x="9037015" y="1600200"/>
+            <a:ext cx="2606040" cy="3749040"/>
+          </a:xfrm>
+          <a:prstGeom prst="roundRect">
+            <a:avLst>
+              <a:gd name="adj" fmla="val 5614"/>
             </a:avLst>
           </a:prstGeom>
           <a:solidFill>
@@ -9213,245 +9775,406 @@
           </a:effectLst>
         </p:spPr>
       </p:sp>
-      <p:sp>
-        <p:nvSpPr>
-          <p:cNvPr id="14" name="Text 11"/>
-          <p:cNvSpPr txBox="1"/>
-          <p:nvPr/>
-        </p:nvSpPr>
-        <p:spPr>
-          <a:xfrm>
-            <a:off x="7223760" y="3798418"/>
-            <a:ext cx="1981048" cy="566928"/>
-          </a:xfrm>
-          <a:prstGeom prst="rect">
-            <a:avLst/>
-          </a:prstGeom>
-          <a:noFill/>
-          <a:ln/>
-        </p:spPr>
-        <p:txBody>
-          <a:bodyPr wrap="square" lIns="0" tIns="0" rIns="0" bIns="0" rtlCol="0" anchor="ctr"/>
-          <a:lstStyle/>
-          <a:p>
-            <a:pPr algn="ctr" indent="0" marL="0">
-              <a:lnSpc>
-                <a:spcPts val="2800"/>
-              </a:lnSpc>
-              <a:buNone/>
-            </a:pPr>
-            <a:r>
-              <a:rPr lang="en-US" sz="2800" b="1" dirty="0">
-                <a:solidFill>
-                  <a:srgbClr val="2E4FD8"/>
-                </a:solidFill>
-                <a:latin typeface="Meiryo UI" pitchFamily="34" charset="0"/>
-                <a:ea typeface="Meiryo UI" pitchFamily="34" charset="-122"/>
-                <a:cs typeface="Meiryo UI" pitchFamily="34" charset="-120"/>
-              </a:rPr>
-              <a:t>27か月目</a:t>
-            </a:r>
-            <a:endParaRPr lang="en-US" sz="2800" dirty="0"/>
-          </a:p>
-        </p:txBody>
-      </p:sp>
-      <p:sp>
-        <p:nvSpPr>
-          <p:cNvPr id="15" name="Text 12"/>
-          <p:cNvSpPr txBox="1"/>
-          <p:nvPr/>
-        </p:nvSpPr>
-        <p:spPr>
-          <a:xfrm>
-            <a:off x="7269480" y="4456786"/>
-            <a:ext cx="1889608" cy="727862"/>
-          </a:xfrm>
-          <a:prstGeom prst="rect">
-            <a:avLst/>
-          </a:prstGeom>
-          <a:noFill/>
-          <a:ln/>
-        </p:spPr>
-        <p:txBody>
-          <a:bodyPr wrap="square" lIns="0" tIns="0" rIns="0" bIns="0" rtlCol="0" anchor="t"/>
-          <a:lstStyle/>
-          <a:p>
-            <a:pPr algn="ctr" indent="0" marL="0">
-              <a:lnSpc>
-                <a:spcPts val="1560"/>
-              </a:lnSpc>
-              <a:buNone/>
-            </a:pPr>
-            <a:r>
-              <a:rPr lang="en-US" sz="1200" dirty="0">
-                <a:solidFill>
-                  <a:srgbClr val="5B6472"/>
-                </a:solidFill>
-                <a:latin typeface="Meiryo UI" pitchFamily="34" charset="0"/>
-                <a:ea typeface="Meiryo UI" pitchFamily="34" charset="-122"/>
-                <a:cs typeface="Meiryo UI" pitchFamily="34" charset="-120"/>
-              </a:rPr>
-              <a:t>初期投資900万円を回収</a:t>
-            </a:r>
-            <a:endParaRPr lang="en-US" sz="1200" dirty="0"/>
-          </a:p>
-        </p:txBody>
-      </p:sp>
-      <p:sp>
-        <p:nvSpPr>
-          <p:cNvPr id="16" name="Shape 13"/>
-          <p:cNvSpPr/>
-          <p:nvPr/>
-        </p:nvSpPr>
-        <p:spPr>
-          <a:xfrm>
-            <a:off x="9479128" y="3520440"/>
-            <a:ext cx="2163928" cy="1737360"/>
-          </a:xfrm>
-          <a:prstGeom prst="roundRect">
-            <a:avLst>
-              <a:gd name="adj" fmla="val 8421"/>
-            </a:avLst>
-          </a:prstGeom>
-          <a:solidFill>
-            <a:srgbClr val="F4F8FF"/>
-          </a:solidFill>
-          <a:ln w="6350">
-            <a:solidFill>
-              <a:srgbClr val="F4F8FF"/>
-            </a:solidFill>
-            <a:prstDash val="solid"/>
-          </a:ln>
-          <a:effectLst>
-            <a:outerShdw sx="100000" sy="100000" kx="0" ky="0" algn="bl" rotWithShape="0" blurRad="127000" dist="38100" dir="5400000">
-              <a:srgbClr val="1F4FB0">
-                <a:alpha val="14000"/>
-              </a:srgbClr>
-            </a:outerShdw>
-          </a:effectLst>
-        </p:spPr>
-      </p:sp>
-      <p:sp>
-        <p:nvSpPr>
-          <p:cNvPr id="17" name="Text 14"/>
-          <p:cNvSpPr txBox="1"/>
-          <p:nvPr/>
-        </p:nvSpPr>
-        <p:spPr>
-          <a:xfrm>
-            <a:off x="9570568" y="3798418"/>
-            <a:ext cx="1981048" cy="566928"/>
-          </a:xfrm>
-          <a:prstGeom prst="rect">
-            <a:avLst/>
-          </a:prstGeom>
-          <a:noFill/>
-          <a:ln/>
-        </p:spPr>
-        <p:txBody>
-          <a:bodyPr wrap="square" lIns="0" tIns="0" rIns="0" bIns="0" rtlCol="0" anchor="ctr"/>
-          <a:lstStyle/>
-          <a:p>
-            <a:pPr algn="ctr" indent="0" marL="0">
-              <a:lnSpc>
-                <a:spcPts val="2400"/>
-              </a:lnSpc>
-              <a:buNone/>
-            </a:pPr>
-            <a:r>
-              <a:rPr lang="en-US" sz="2400" b="1" dirty="0">
-                <a:solidFill>
-                  <a:srgbClr val="6A3FC9"/>
-                </a:solidFill>
-                <a:latin typeface="Meiryo UI" pitchFamily="34" charset="0"/>
-                <a:ea typeface="Meiryo UI" pitchFamily="34" charset="-122"/>
-                <a:cs typeface="Meiryo UI" pitchFamily="34" charset="-120"/>
-              </a:rPr>
-              <a:t>1,140万円</a:t>
-            </a:r>
-            <a:endParaRPr lang="en-US" sz="2400" dirty="0"/>
-          </a:p>
-        </p:txBody>
-      </p:sp>
-      <p:sp>
-        <p:nvSpPr>
-          <p:cNvPr id="18" name="Text 15"/>
-          <p:cNvSpPr txBox="1"/>
-          <p:nvPr/>
-        </p:nvSpPr>
-        <p:spPr>
-          <a:xfrm>
-            <a:off x="9616288" y="4456786"/>
-            <a:ext cx="1889608" cy="727862"/>
-          </a:xfrm>
-          <a:prstGeom prst="rect">
-            <a:avLst/>
-          </a:prstGeom>
-          <a:noFill/>
-          <a:ln/>
-        </p:spPr>
-        <p:txBody>
-          <a:bodyPr wrap="square" lIns="0" tIns="0" rIns="0" bIns="0" rtlCol="0" anchor="t"/>
-          <a:lstStyle/>
-          <a:p>
-            <a:pPr algn="ctr" indent="0" marL="0">
-              <a:lnSpc>
-                <a:spcPts val="1560"/>
-              </a:lnSpc>
-              <a:buNone/>
-            </a:pPr>
-            <a:r>
-              <a:rPr lang="en-US" sz="1200" dirty="0">
-                <a:solidFill>
-                  <a:srgbClr val="5B6472"/>
-                </a:solidFill>
-                <a:latin typeface="Meiryo UI" pitchFamily="34" charset="0"/>
-                <a:ea typeface="Meiryo UI" pitchFamily="34" charset="-122"/>
-                <a:cs typeface="Meiryo UI" pitchFamily="34" charset="-120"/>
-              </a:rPr>
-              <a:t>3年目の営業利益</a:t>
-            </a:r>
-            <a:endParaRPr lang="en-US" sz="1200" dirty="0"/>
-          </a:p>
-          <a:p>
-            <a:pPr algn="ctr" indent="0" marL="0">
-              <a:lnSpc>
-                <a:spcPts val="1560"/>
-              </a:lnSpc>
-              <a:buNone/>
-            </a:pPr>
-            <a:r>
-              <a:rPr lang="en-US" sz="1200" dirty="0">
-                <a:solidFill>
-                  <a:srgbClr val="5B6472"/>
-                </a:solidFill>
-                <a:latin typeface="Meiryo UI" pitchFamily="34" charset="0"/>
-                <a:ea typeface="Meiryo UI" pitchFamily="34" charset="-122"/>
-                <a:cs typeface="Meiryo UI" pitchFamily="34" charset="-120"/>
-              </a:rPr>
-              <a:t>（概算）</a:t>
-            </a:r>
-            <a:endParaRPr lang="en-US" sz="1200" dirty="0"/>
-          </a:p>
-        </p:txBody>
-      </p:sp>
       <p:pic>
         <p:nvPicPr>
-          <p:cNvPr id="19" name="Image 0" descr="/home/user/-/presentation/candidates/assets/orb_5.png">    </p:cNvPr>
+          <p:cNvPr id="36" name="Image 3" descr="/home/user/-/presentation/candidates/assets/orb_6.png">    </p:cNvPr>
           <p:cNvPicPr>
             <a:picLocks noChangeAspect="1"/>
           </p:cNvPicPr>
           <p:nvPr/>
         </p:nvPicPr>
         <p:blipFill>
-          <a:blip r:embed="rId2"/>
+          <a:blip r:embed="rId4"/>
           <a:stretch>
             <a:fillRect/>
           </a:stretch>
         </p:blipFill>
         <p:spPr>
           <a:xfrm>
-            <a:off x="548640" y="5596128"/>
+            <a:off x="9293047" y="1856232"/>
+            <a:ext cx="566928" cy="566928"/>
+          </a:xfrm>
+          <a:prstGeom prst="rect">
+            <a:avLst/>
+          </a:prstGeom>
+        </p:spPr>
+      </p:pic>
+      <p:sp>
+        <p:nvSpPr>
+          <p:cNvPr id="37" name="Text 31"/>
+          <p:cNvSpPr txBox="1"/>
+          <p:nvPr/>
+        </p:nvSpPr>
+        <p:spPr>
+          <a:xfrm>
+            <a:off x="9293047" y="1856232"/>
+            <a:ext cx="566928" cy="566928"/>
+          </a:xfrm>
+          <a:prstGeom prst="rect">
+            <a:avLst/>
+          </a:prstGeom>
+          <a:noFill/>
+          <a:ln/>
+        </p:spPr>
+        <p:txBody>
+          <a:bodyPr wrap="square" lIns="0" tIns="0" rIns="0" bIns="0" rtlCol="0" anchor="ctr"/>
+          <a:lstStyle/>
+          <a:p>
+            <a:pPr algn="ctr" indent="0" marL="0">
+              <a:lnSpc>
+                <a:spcPts val="1900"/>
+              </a:lnSpc>
+              <a:buNone/>
+            </a:pPr>
+            <a:r>
+              <a:rPr lang="en-US" sz="1900" b="1" dirty="0">
+                <a:solidFill>
+                  <a:srgbClr val="FFFFFF"/>
+                </a:solidFill>
+                <a:latin typeface="Meiryo UI" pitchFamily="34" charset="0"/>
+                <a:ea typeface="Meiryo UI" pitchFamily="34" charset="-122"/>
+                <a:cs typeface="Meiryo UI" pitchFamily="34" charset="-120"/>
+              </a:rPr>
+              <a:t>4</a:t>
+            </a:r>
+            <a:endParaRPr lang="en-US" sz="1900" dirty="0"/>
+          </a:p>
+        </p:txBody>
+      </p:sp>
+      <p:sp>
+        <p:nvSpPr>
+          <p:cNvPr id="38" name="Text 32"/>
+          <p:cNvSpPr txBox="1"/>
+          <p:nvPr/>
+        </p:nvSpPr>
+        <p:spPr>
+          <a:xfrm>
+            <a:off x="9997135" y="1819656"/>
+            <a:ext cx="1554480" cy="384048"/>
+          </a:xfrm>
+          <a:prstGeom prst="rect">
+            <a:avLst/>
+          </a:prstGeom>
+          <a:noFill/>
+          <a:ln/>
+        </p:spPr>
+        <p:txBody>
+          <a:bodyPr wrap="square" lIns="0" tIns="0" rIns="0" bIns="0" rtlCol="0" anchor="ctr"/>
+          <a:lstStyle/>
+          <a:p>
+            <a:pPr indent="0" marL="0">
+              <a:lnSpc>
+                <a:spcPts val="2200"/>
+              </a:lnSpc>
+              <a:buNone/>
+            </a:pPr>
+            <a:r>
+              <a:rPr lang="en-US" sz="2000" b="1" dirty="0">
+                <a:solidFill>
+                  <a:srgbClr val="2E3440"/>
+                </a:solidFill>
+                <a:latin typeface="Meiryo UI" pitchFamily="34" charset="0"/>
+                <a:ea typeface="Meiryo UI" pitchFamily="34" charset="-122"/>
+                <a:cs typeface="Meiryo UI" pitchFamily="34" charset="-120"/>
+              </a:rPr>
+              <a:t>その先</a:t>
+            </a:r>
+            <a:endParaRPr lang="en-US" sz="2000" dirty="0"/>
+          </a:p>
+        </p:txBody>
+      </p:sp>
+      <p:sp>
+        <p:nvSpPr>
+          <p:cNvPr id="39" name="Text 33"/>
+          <p:cNvSpPr txBox="1"/>
+          <p:nvPr/>
+        </p:nvSpPr>
+        <p:spPr>
+          <a:xfrm>
+            <a:off x="9997135" y="2185416"/>
+            <a:ext cx="1554480" cy="274320"/>
+          </a:xfrm>
+          <a:prstGeom prst="rect">
+            <a:avLst/>
+          </a:prstGeom>
+          <a:noFill/>
+          <a:ln/>
+        </p:spPr>
+        <p:txBody>
+          <a:bodyPr wrap="square" lIns="0" tIns="0" rIns="0" bIns="0" rtlCol="0" anchor="ctr"/>
+          <a:lstStyle/>
+          <a:p>
+            <a:pPr indent="0" marL="0">
+              <a:lnSpc>
+                <a:spcPts val="1430"/>
+              </a:lnSpc>
+              <a:buNone/>
+            </a:pPr>
+            <a:r>
+              <a:rPr lang="en-US" sz="1300" b="1" dirty="0">
+                <a:solidFill>
+                  <a:srgbClr val="8E3FB8"/>
+                </a:solidFill>
+                <a:latin typeface="Meiryo UI" pitchFamily="34" charset="0"/>
+                <a:ea typeface="Meiryo UI" pitchFamily="34" charset="-122"/>
+                <a:cs typeface="Meiryo UI" pitchFamily="34" charset="-120"/>
+              </a:rPr>
+              <a:t>広げる</a:t>
+            </a:r>
+            <a:endParaRPr lang="en-US" sz="1300" dirty="0"/>
+          </a:p>
+        </p:txBody>
+      </p:sp>
+      <p:sp>
+        <p:nvSpPr>
+          <p:cNvPr id="40" name="Text 34"/>
+          <p:cNvSpPr txBox="1"/>
+          <p:nvPr/>
+        </p:nvSpPr>
+        <p:spPr>
+          <a:xfrm>
+            <a:off x="9293047" y="2651760"/>
+            <a:ext cx="2240280" cy="1600200"/>
+          </a:xfrm>
+          <a:prstGeom prst="rect">
+            <a:avLst/>
+          </a:prstGeom>
+          <a:noFill/>
+          <a:ln/>
+        </p:spPr>
+        <p:txBody>
+          <a:bodyPr wrap="square" lIns="0" tIns="0" rIns="0" bIns="0" rtlCol="0" anchor="t"/>
+          <a:lstStyle/>
+          <a:p>
+            <a:pPr indent="0" marL="0">
+              <a:lnSpc>
+                <a:spcPts val="1780"/>
+              </a:lnSpc>
+              <a:buNone/>
+            </a:pPr>
+            <a:r>
+              <a:rPr lang="en-US" sz="1250" dirty="0">
+                <a:solidFill>
+                  <a:srgbClr val="2E3440"/>
+                </a:solidFill>
+                <a:latin typeface="Meiryo UI" pitchFamily="34" charset="0"/>
+                <a:ea typeface="Meiryo UI" pitchFamily="34" charset="-122"/>
+                <a:cs typeface="Meiryo UI" pitchFamily="34" charset="-120"/>
+              </a:rPr>
+              <a:t>・B型の開設・運営</a:t>
+            </a:r>
+            <a:endParaRPr lang="en-US" sz="1250" dirty="0"/>
+          </a:p>
+          <a:p>
+            <a:pPr indent="0" marL="0">
+              <a:lnSpc>
+                <a:spcPts val="1780"/>
+              </a:lnSpc>
+              <a:buNone/>
+            </a:pPr>
+            <a:r>
+              <a:rPr lang="en-US" sz="1250" dirty="0">
+                <a:solidFill>
+                  <a:srgbClr val="2E3440"/>
+                </a:solidFill>
+                <a:latin typeface="Meiryo UI" pitchFamily="34" charset="0"/>
+                <a:ea typeface="Meiryo UI" pitchFamily="34" charset="-122"/>
+                <a:cs typeface="Meiryo UI" pitchFamily="34" charset="-120"/>
+              </a:rPr>
+              <a:t>・放課後児童クラブへの</a:t>
+            </a:r>
+            <a:endParaRPr lang="en-US" sz="1250" dirty="0"/>
+          </a:p>
+          <a:p>
+            <a:pPr indent="0" marL="0">
+              <a:lnSpc>
+                <a:spcPts val="1780"/>
+              </a:lnSpc>
+              <a:buNone/>
+            </a:pPr>
+            <a:r>
+              <a:rPr lang="en-US" sz="1250" dirty="0">
+                <a:solidFill>
+                  <a:srgbClr val="2E3440"/>
+                </a:solidFill>
+                <a:latin typeface="Meiryo UI" pitchFamily="34" charset="0"/>
+                <a:ea typeface="Meiryo UI" pitchFamily="34" charset="-122"/>
+                <a:cs typeface="Meiryo UI" pitchFamily="34" charset="-120"/>
+              </a:rPr>
+              <a:t>　参入を検討</a:t>
+            </a:r>
+            <a:endParaRPr lang="en-US" sz="1250" dirty="0"/>
+          </a:p>
+          <a:p>
+            <a:pPr indent="0" marL="0">
+              <a:lnSpc>
+                <a:spcPts val="1780"/>
+              </a:lnSpc>
+              <a:buNone/>
+            </a:pPr>
+            <a:r>
+              <a:rPr lang="en-US" sz="1250" dirty="0">
+                <a:solidFill>
+                  <a:srgbClr val="2E3440"/>
+                </a:solidFill>
+                <a:latin typeface="Meiryo UI" pitchFamily="34" charset="0"/>
+                <a:ea typeface="Meiryo UI" pitchFamily="34" charset="-122"/>
+                <a:cs typeface="Meiryo UI" pitchFamily="34" charset="-120"/>
+              </a:rPr>
+              <a:t>・四国支社構想へ</a:t>
+            </a:r>
+            <a:endParaRPr lang="en-US" sz="1250" dirty="0"/>
+          </a:p>
+        </p:txBody>
+      </p:sp>
+      <p:sp>
+        <p:nvSpPr>
+          <p:cNvPr id="41" name="Shape 35"/>
+          <p:cNvSpPr/>
+          <p:nvPr/>
+        </p:nvSpPr>
+        <p:spPr>
+          <a:xfrm>
+            <a:off x="9293047" y="4343400"/>
+            <a:ext cx="868680" cy="292608"/>
+          </a:xfrm>
+          <a:prstGeom prst="roundRect">
+            <a:avLst>
+              <a:gd name="adj" fmla="val 50000"/>
+            </a:avLst>
+          </a:prstGeom>
+          <a:solidFill>
+            <a:srgbClr val="8E3FB8"/>
+          </a:solidFill>
+          <a:ln w="6350">
+            <a:solidFill>
+              <a:srgbClr val="8E3FB8"/>
+            </a:solidFill>
+            <a:prstDash val="solid"/>
+          </a:ln>
+        </p:spPr>
+      </p:sp>
+      <p:sp>
+        <p:nvSpPr>
+          <p:cNvPr id="42" name="Text 36"/>
+          <p:cNvSpPr txBox="1"/>
+          <p:nvPr/>
+        </p:nvSpPr>
+        <p:spPr>
+          <a:xfrm>
+            <a:off x="9293047" y="4343400"/>
+            <a:ext cx="868680" cy="292608"/>
+          </a:xfrm>
+          <a:prstGeom prst="rect">
+            <a:avLst/>
+          </a:prstGeom>
+          <a:noFill/>
+          <a:ln/>
+        </p:spPr>
+        <p:txBody>
+          <a:bodyPr wrap="square" lIns="0" tIns="0" rIns="0" bIns="0" rtlCol="0" anchor="ctr"/>
+          <a:lstStyle/>
+          <a:p>
+            <a:pPr algn="ctr" indent="0" marL="0">
+              <a:lnSpc>
+                <a:spcPts val="1300"/>
+              </a:lnSpc>
+              <a:buNone/>
+            </a:pPr>
+            <a:r>
+              <a:rPr lang="en-US" sz="1300" b="1" dirty="0">
+                <a:solidFill>
+                  <a:srgbClr val="FFFFFF"/>
+                </a:solidFill>
+                <a:latin typeface="Meiryo UI" pitchFamily="34" charset="0"/>
+                <a:ea typeface="Meiryo UI" pitchFamily="34" charset="-122"/>
+                <a:cs typeface="Meiryo UI" pitchFamily="34" charset="-120"/>
+              </a:rPr>
+              <a:t>成果物</a:t>
+            </a:r>
+            <a:endParaRPr lang="en-US" sz="1300" dirty="0"/>
+          </a:p>
+        </p:txBody>
+      </p:sp>
+      <p:sp>
+        <p:nvSpPr>
+          <p:cNvPr id="43" name="Text 37"/>
+          <p:cNvSpPr txBox="1"/>
+          <p:nvPr/>
+        </p:nvSpPr>
+        <p:spPr>
+          <a:xfrm>
+            <a:off x="9293047" y="4709160"/>
+            <a:ext cx="2240280" cy="548640"/>
+          </a:xfrm>
+          <a:prstGeom prst="rect">
+            <a:avLst/>
+          </a:prstGeom>
+          <a:noFill/>
+          <a:ln/>
+        </p:spPr>
+        <p:txBody>
+          <a:bodyPr wrap="square" lIns="0" tIns="0" rIns="0" bIns="0" rtlCol="0" anchor="t"/>
+          <a:lstStyle/>
+          <a:p>
+            <a:pPr indent="0" marL="0">
+              <a:lnSpc>
+                <a:spcPts val="1620"/>
+              </a:lnSpc>
+              <a:buNone/>
+            </a:pPr>
+            <a:r>
+              <a:rPr lang="en-US" sz="1200" dirty="0">
+                <a:solidFill>
+                  <a:srgbClr val="5B6472"/>
+                </a:solidFill>
+                <a:latin typeface="Meiryo UI" pitchFamily="34" charset="0"/>
+                <a:ea typeface="Meiryo UI" pitchFamily="34" charset="-122"/>
+                <a:cs typeface="Meiryo UI" pitchFamily="34" charset="-120"/>
+              </a:rPr>
+              <a:t>B型の開設</a:t>
+            </a:r>
+            <a:endParaRPr lang="en-US" sz="1200" dirty="0"/>
+          </a:p>
+          <a:p>
+            <a:pPr indent="0" marL="0">
+              <a:lnSpc>
+                <a:spcPts val="1620"/>
+              </a:lnSpc>
+              <a:buNone/>
+            </a:pPr>
+            <a:r>
+              <a:rPr lang="en-US" sz="1200" dirty="0">
+                <a:solidFill>
+                  <a:srgbClr val="5B6472"/>
+                </a:solidFill>
+                <a:latin typeface="Meiryo UI" pitchFamily="34" charset="0"/>
+                <a:ea typeface="Meiryo UI" pitchFamily="34" charset="-122"/>
+                <a:cs typeface="Meiryo UI" pitchFamily="34" charset="-120"/>
+              </a:rPr>
+              <a:t>次の展開案</a:t>
+            </a:r>
+            <a:endParaRPr lang="en-US" sz="1200" dirty="0"/>
+          </a:p>
+        </p:txBody>
+      </p:sp>
+      <p:pic>
+        <p:nvPicPr>
+          <p:cNvPr id="44" name="Image 4" descr="/home/user/-/presentation/candidates/assets/orb_5.png">    </p:cNvPr>
+          <p:cNvPicPr>
+            <a:picLocks noChangeAspect="1"/>
+          </p:cNvPicPr>
+          <p:nvPr/>
+        </p:nvPicPr>
+        <p:blipFill>
+          <a:blip r:embed="rId5"/>
+          <a:stretch>
+            <a:fillRect/>
+          </a:stretch>
+        </p:blipFill>
+        <p:spPr>
+          <a:xfrm>
+            <a:off x="548640" y="5655564"/>
             <a:ext cx="219456" cy="219456"/>
           </a:xfrm>
           <a:prstGeom prst="rect">
@@ -9461,14 +10184,14 @@
       </p:pic>
       <p:sp>
         <p:nvSpPr>
-          <p:cNvPr id="20" name="Text 16"/>
-          <p:cNvSpPr txBox="1"/>
-          <p:nvPr/>
-        </p:nvSpPr>
-        <p:spPr>
-          <a:xfrm>
-            <a:off x="932688" y="5468112"/>
-            <a:ext cx="10710367" cy="475488"/>
+          <p:cNvPr id="45" name="Text 38"/>
+          <p:cNvSpPr txBox="1"/>
+          <p:nvPr/>
+        </p:nvSpPr>
+        <p:spPr>
+          <a:xfrm>
+            <a:off x="932688" y="5513832"/>
+            <a:ext cx="10710367" cy="502920"/>
           </a:xfrm>
           <a:prstGeom prst="rect">
             <a:avLst/>
@@ -9482,12 +10205,12 @@
           <a:p>
             <a:pPr indent="0" marL="0">
               <a:lnSpc>
-                <a:spcPts val="2210"/>
-              </a:lnSpc>
-              <a:buNone/>
-            </a:pPr>
-            <a:r>
-              <a:rPr lang="en-US" sz="1700" b="1" dirty="0">
+                <a:spcPts val="2340"/>
+              </a:lnSpc>
+              <a:buNone/>
+            </a:pPr>
+            <a:r>
+              <a:rPr lang="en-US" sz="1800" b="1" dirty="0">
                 <a:solidFill>
                   <a:srgbClr val="0B3A9E"/>
                 </a:solidFill>
@@ -9495,51 +10218,9 @@
                 <a:ea typeface="Meiryo UI" pitchFamily="34" charset="-122"/>
                 <a:cs typeface="Meiryo UI" pitchFamily="34" charset="-120"/>
               </a:rPr>
-              <a:t>黒字ラインは1日11人前後。工賃が愛媛平均（2.3万円）に届けば、年間約100万円の上乗せ。</a:t>
-            </a:r>
-            <a:endParaRPr lang="en-US" sz="1700" dirty="0"/>
-          </a:p>
-        </p:txBody>
-      </p:sp>
-      <p:sp>
-        <p:nvSpPr>
-          <p:cNvPr id="21" name="Text 17"/>
-          <p:cNvSpPr txBox="1"/>
-          <p:nvPr/>
-        </p:nvSpPr>
-        <p:spPr>
-          <a:xfrm>
-            <a:off x="548640" y="6035040"/>
-            <a:ext cx="11094415" cy="256032"/>
-          </a:xfrm>
-          <a:prstGeom prst="rect">
-            <a:avLst/>
-          </a:prstGeom>
-          <a:noFill/>
-          <a:ln/>
-        </p:spPr>
-        <p:txBody>
-          <a:bodyPr wrap="square" lIns="0" tIns="0" rIns="0" bIns="0" rtlCol="0" anchor="t"/>
-          <a:lstStyle/>
-          <a:p>
-            <a:pPr indent="0" marL="0">
-              <a:lnSpc>
-                <a:spcPts val="1100"/>
-              </a:lnSpc>
-              <a:buNone/>
-            </a:pPr>
-            <a:r>
-              <a:rPr lang="en-US" sz="1000" dirty="0">
-                <a:solidFill>
-                  <a:srgbClr val="8A93A3"/>
-                </a:solidFill>
-                <a:latin typeface="Meiryo UI" pitchFamily="34" charset="0"/>
-                <a:ea typeface="Meiryo UI" pitchFamily="34" charset="-122"/>
-                <a:cs typeface="Meiryo UI" pitchFamily="34" charset="-120"/>
-              </a:rPr>
-              <a:t>※標準シナリオ（定員20名・人員配置6:1・2027年4月開設・初期投資900万円）。人件費・家賃は仮置き。報酬は令和8年6月の見直しと新規指定の特例（984/1000）を反映。</a:t>
-            </a:r>
-            <a:endParaRPr lang="en-US" sz="1000" dirty="0"/>
+              <a:t>ニーズを数字にし、制度のリスクを早めに確かめ、半年で事業計画書を形にする。</a:t>
+            </a:r>
+            <a:endParaRPr lang="en-US" sz="1800" dirty="0"/>
           </a:p>
         </p:txBody>
       </p:sp>
